--- a/magaza-tasarimi-dersi/Magaza-Okuma-Calisma-Kagidi.pptx
+++ b/magaza-tasarimi-dersi/Magaza-Okuma-Calisma-Kagidi.pptx
@@ -7,9 +7,10 @@
   <p:sldIdLst>
     <p:sldId id="256" r:id="rId2"/>
     <p:sldId id="257" r:id="rId3"/>
+    <p:sldId id="258" r:id="rId4"/>
   </p:sldIdLst>
   <p:notesMasterIdLst>
-    <p:notesMasterId r:id="rId4"/>
+    <p:notesMasterId r:id="rId5"/>
   </p:notesMasterIdLst>
   <p:sldSz cx="12192000" cy="6858000"/>
   <p:notesSz cx="6858000" cy="12192000"/>
@@ -591,7 +592,7 @@
           <a:p>
             <a:r>
               <a:rPr lang="en-US" dirty="0"/>
-              <a:t>Bu sayfayı öğrencilere dağıtmayın; kendinizde kalsın. Örnek satırı sadece sözlü olarak, ekrandaki beşinci görsel üzerinden gösterin.</a:t>
+              <a:t>Grup başına bir kâğıt. Kalemi grupta en az konuşan kişiye verin — bu, baskın öğrencinin kâğıdı ele geçirmesini engeller.</a:t>
             </a:r>
             <a:endParaRPr lang="en-US" dirty="0"/>
           </a:p>
@@ -615,6 +616,94 @@
             <a:fld id="{F7021451-1387-4CA6-816F-3879F97B5CBC}" type="slidenum">
               <a:rPr lang="en-US"/>
               <a:t>2</a:t>
+            </a:fld>
+            <a:endParaRPr lang="en-US"/>
+          </a:p>
+        </p:txBody>
+      </p:sp>
+    </p:spTree>
+    <p:extLst>
+      <p:ext uri="{BB962C8B-B14F-4D97-AF65-F5344CB8AC3E}">
+        <p14:creationId xmlns:p14="http://schemas.microsoft.com/office/powerpoint/2010/main" val="1024086991"/>
+      </p:ext>
+    </p:extLst>
+  </p:cSld>
+  <p:clrMapOvr>
+    <a:masterClrMapping/>
+  </p:clrMapOvr>
+</p:notes>
+</file>
+
+<file path=ppt/notesSlides/notesSlide3.xml><?xml version="1.0" encoding="utf-8"?>
+<p:notes xmlns:a="http://schemas.openxmlformats.org/drawingml/2006/main" xmlns:r="http://schemas.openxmlformats.org/officeDocument/2006/relationships" xmlns:p="http://schemas.openxmlformats.org/presentationml/2006/main">
+  <p:cSld>
+    <p:spTree>
+      <p:nvGrpSpPr>
+        <p:cNvPr id="1" name=""/>
+        <p:cNvGrpSpPr/>
+        <p:nvPr/>
+      </p:nvGrpSpPr>
+      <p:grpSpPr>
+        <a:xfrm>
+          <a:off x="0" y="0"/>
+          <a:ext cx="0" cy="0"/>
+          <a:chOff x="0" y="0"/>
+          <a:chExt cx="0" cy="0"/>
+        </a:xfrm>
+      </p:grpSpPr>
+      <p:sp>
+        <p:nvSpPr>
+          <p:cNvPr id="2" name="Slide Image Placeholder 1"/>
+          <p:cNvSpPr>
+            <a:spLocks noGrp="1" noRot="1" noChangeAspect="1"/>
+          </p:cNvSpPr>
+          <p:nvPr>
+            <p:ph type="sldImg"/>
+          </p:nvPr>
+        </p:nvSpPr>
+        <p:spPr/>
+      </p:sp>
+      <p:sp>
+        <p:nvSpPr>
+          <p:cNvPr id="3" name="Notes Placeholder 2"/>
+          <p:cNvSpPr>
+            <a:spLocks noGrp="1"/>
+          </p:cNvSpPr>
+          <p:nvPr>
+            <p:ph type="body" idx="1"/>
+          </p:nvPr>
+        </p:nvSpPr>
+        <p:spPr/>
+        <p:txBody>
+          <a:bodyPr/>
+          <a:lstStyle/>
+          <a:p>
+            <a:r>
+              <a:rPr lang="en-US" dirty="0"/>
+              <a:t>Bu sayfa öğrencilere dağıtılmaz.</a:t>
+            </a:r>
+            <a:endParaRPr lang="en-US" dirty="0"/>
+          </a:p>
+        </p:txBody>
+      </p:sp>
+      <p:sp>
+        <p:nvSpPr>
+          <p:cNvPr id="4" name="Slide Number Placeholder 3"/>
+          <p:cNvSpPr>
+            <a:spLocks noGrp="1"/>
+          </p:cNvSpPr>
+          <p:nvPr>
+            <p:ph type="sldNum" sz="quarter" idx="10"/>
+          </p:nvPr>
+        </p:nvSpPr>
+        <p:spPr/>
+        <p:txBody>
+          <a:bodyPr/>
+          <a:lstStyle/>
+          <a:p>
+            <a:fld id="{F7021451-1387-4CA6-816F-3879F97B5CBC}" type="slidenum">
+              <a:rPr lang="en-US"/>
+              <a:t>3</a:t>
             </a:fld>
             <a:endParaRPr lang="en-US"/>
           </a:p>
@@ -3107,24 +3196,24 @@
         </p:nvSpPr>
         <p:spPr>
           <a:xfrm>
-            <a:off x="548640" y="292608"/>
-            <a:ext cx="7315200" cy="457200"/>
-          </a:xfrm>
-          <a:prstGeom prst="rect">
-            <a:avLst/>
-          </a:prstGeom>
-          <a:noFill/>
-          <a:ln/>
-        </p:spPr>
-        <p:txBody>
-          <a:bodyPr wrap="square" lIns="0" tIns="0" rIns="0" bIns="0" rtlCol="0" anchor="ctr"/>
-          <a:lstStyle/>
-          <a:p>
-            <a:pPr indent="0" marL="0">
-              <a:buNone/>
-            </a:pPr>
-            <a:r>
-              <a:rPr lang="en-US" sz="2400" b="1" dirty="0">
+            <a:off x="548640" y="274320"/>
+            <a:ext cx="6400800" cy="457200"/>
+          </a:xfrm>
+          <a:prstGeom prst="rect">
+            <a:avLst/>
+          </a:prstGeom>
+          <a:noFill/>
+          <a:ln/>
+        </p:spPr>
+        <p:txBody>
+          <a:bodyPr wrap="square" lIns="0" tIns="0" rIns="0" bIns="0" rtlCol="0" anchor="ctr"/>
+          <a:lstStyle/>
+          <a:p>
+            <a:pPr indent="0" marL="0">
+              <a:buNone/>
+            </a:pPr>
+            <a:r>
+              <a:rPr lang="en-US" sz="2600" b="1" dirty="0">
                 <a:solidFill>
                   <a:srgbClr val="16161A"/>
                 </a:solidFill>
@@ -3132,9 +3221,9 @@
                 <a:ea typeface="Cambria" pitchFamily="34" charset="-122"/>
                 <a:cs typeface="Cambria" pitchFamily="34" charset="-120"/>
               </a:rPr>
-              <a:t>Egzersizi yönetme notu</a:t>
-            </a:r>
-            <a:endParaRPr lang="en-US" sz="2400" dirty="0"/>
+              <a:t>Aynı görsel, dört okuma</a:t>
+            </a:r>
+            <a:endParaRPr lang="en-US" sz="2600" dirty="0"/>
           </a:p>
         </p:txBody>
       </p:sp>
@@ -3146,8 +3235,8 @@
         </p:nvSpPr>
         <p:spPr>
           <a:xfrm>
-            <a:off x="548640" y="749808"/>
-            <a:ext cx="7315200" cy="256032"/>
+            <a:off x="548640" y="731520"/>
+            <a:ext cx="6949440" cy="274320"/>
           </a:xfrm>
           <a:prstGeom prst="rect">
             <a:avLst/>
@@ -3171,7 +3260,7 @@
                 <a:ea typeface="Calibri" pitchFamily="34" charset="-122"/>
                 <a:cs typeface="Calibri" pitchFamily="34" charset="-120"/>
               </a:rPr>
-              <a:t>Mağaza okuma  ·  75 dakika</a:t>
+              <a:t>Grup çalışması  ·  45 dakika  ·  Amaç uzlaşmak değil, ayrışmayı kullanmak</a:t>
             </a:r>
             <a:endParaRPr lang="en-US" sz="1050" dirty="0"/>
           </a:p>
@@ -3185,34 +3274,34 @@
         </p:nvSpPr>
         <p:spPr>
           <a:xfrm>
-            <a:off x="548640" y="1234440"/>
-            <a:ext cx="5120640" cy="237744"/>
-          </a:xfrm>
-          <a:prstGeom prst="rect">
-            <a:avLst/>
-          </a:prstGeom>
-          <a:noFill/>
-          <a:ln/>
-        </p:spPr>
-        <p:txBody>
-          <a:bodyPr wrap="square" lIns="0" tIns="0" rIns="0" bIns="0" rtlCol="0" anchor="ctr"/>
-          <a:lstStyle/>
-          <a:p>
-            <a:pPr indent="0" marL="0">
-              <a:buNone/>
-            </a:pPr>
-            <a:r>
-              <a:rPr lang="en-US" sz="900" b="1" spc="160" kern="0" dirty="0">
-                <a:solidFill>
-                  <a:srgbClr val="8C3A2B"/>
-                </a:solidFill>
-                <a:latin typeface="Calibri" pitchFamily="34" charset="0"/>
-                <a:ea typeface="Calibri" pitchFamily="34" charset="-122"/>
-                <a:cs typeface="Calibri" pitchFamily="34" charset="-120"/>
-              </a:rPr>
-              <a:t>GÖRSEL SEÇİM KRİTERLERİ</a:t>
-            </a:r>
-            <a:endParaRPr lang="en-US" sz="900" dirty="0"/>
+            <a:off x="7680960" y="310896"/>
+            <a:ext cx="1097280" cy="219456"/>
+          </a:xfrm>
+          <a:prstGeom prst="rect">
+            <a:avLst/>
+          </a:prstGeom>
+          <a:noFill/>
+          <a:ln/>
+        </p:spPr>
+        <p:txBody>
+          <a:bodyPr wrap="square" lIns="0" tIns="0" rIns="0" bIns="0" rtlCol="0" anchor="ctr"/>
+          <a:lstStyle/>
+          <a:p>
+            <a:pPr indent="0" marL="0">
+              <a:buNone/>
+            </a:pPr>
+            <a:r>
+              <a:rPr lang="en-US" sz="800" b="1" spc="140" kern="0" dirty="0">
+                <a:solidFill>
+                  <a:srgbClr val="A6A6AC"/>
+                </a:solidFill>
+                <a:latin typeface="Calibri" pitchFamily="34" charset="0"/>
+                <a:ea typeface="Calibri" pitchFamily="34" charset="-122"/>
+                <a:cs typeface="Calibri" pitchFamily="34" charset="-120"/>
+              </a:rPr>
+              <a:t>GÖRSEL NO</a:t>
+            </a:r>
+            <a:endParaRPr lang="en-US" sz="800" dirty="0"/>
           </a:p>
         </p:txBody>
       </p:sp>
@@ -3224,7 +3313,1821 @@
         </p:nvSpPr>
         <p:spPr>
           <a:xfrm>
-            <a:off x="612648" y="1545336"/>
+            <a:off x="8732520" y="530352"/>
+            <a:ext cx="685800" cy="0"/>
+          </a:xfrm>
+          <a:prstGeom prst="line">
+            <a:avLst/>
+          </a:prstGeom>
+          <a:noFill/>
+          <a:ln w="11430">
+            <a:solidFill>
+              <a:srgbClr val="7A7A82"/>
+            </a:solidFill>
+            <a:prstDash val="solid"/>
+          </a:ln>
+        </p:spPr>
+      </p:sp>
+      <p:sp>
+        <p:nvSpPr>
+          <p:cNvPr id="6" name="Text 4"/>
+          <p:cNvSpPr txBox="1"/>
+          <p:nvPr/>
+        </p:nvSpPr>
+        <p:spPr>
+          <a:xfrm>
+            <a:off x="9601200" y="310896"/>
+            <a:ext cx="1280160" cy="219456"/>
+          </a:xfrm>
+          <a:prstGeom prst="rect">
+            <a:avLst/>
+          </a:prstGeom>
+          <a:noFill/>
+          <a:ln/>
+        </p:spPr>
+        <p:txBody>
+          <a:bodyPr wrap="square" lIns="0" tIns="0" rIns="0" bIns="0" rtlCol="0" anchor="ctr"/>
+          <a:lstStyle/>
+          <a:p>
+            <a:pPr indent="0" marL="0">
+              <a:buNone/>
+            </a:pPr>
+            <a:r>
+              <a:rPr lang="en-US" sz="800" b="1" spc="140" kern="0" dirty="0">
+                <a:solidFill>
+                  <a:srgbClr val="A6A6AC"/>
+                </a:solidFill>
+                <a:latin typeface="Calibri" pitchFamily="34" charset="0"/>
+                <a:ea typeface="Calibri" pitchFamily="34" charset="-122"/>
+                <a:cs typeface="Calibri" pitchFamily="34" charset="-120"/>
+              </a:rPr>
+              <a:t>GRUP ÜYELERİ</a:t>
+            </a:r>
+            <a:endParaRPr lang="en-US" sz="800" dirty="0"/>
+          </a:p>
+        </p:txBody>
+      </p:sp>
+      <p:sp>
+        <p:nvSpPr>
+          <p:cNvPr id="7" name="Shape 5"/>
+          <p:cNvSpPr/>
+          <p:nvPr/>
+        </p:nvSpPr>
+        <p:spPr>
+          <a:xfrm>
+            <a:off x="9601200" y="530352"/>
+            <a:ext cx="2039112" cy="0"/>
+          </a:xfrm>
+          <a:prstGeom prst="line">
+            <a:avLst/>
+          </a:prstGeom>
+          <a:noFill/>
+          <a:ln w="11430">
+            <a:solidFill>
+              <a:srgbClr val="7A7A82"/>
+            </a:solidFill>
+            <a:prstDash val="solid"/>
+          </a:ln>
+        </p:spPr>
+      </p:sp>
+      <p:sp>
+        <p:nvSpPr>
+          <p:cNvPr id="8" name="Shape 6"/>
+          <p:cNvSpPr/>
+          <p:nvPr/>
+        </p:nvSpPr>
+        <p:spPr>
+          <a:xfrm>
+            <a:off x="9601200" y="768096"/>
+            <a:ext cx="2039112" cy="0"/>
+          </a:xfrm>
+          <a:prstGeom prst="line">
+            <a:avLst/>
+          </a:prstGeom>
+          <a:noFill/>
+          <a:ln w="9525">
+            <a:solidFill>
+              <a:srgbClr val="E4E4E8"/>
+            </a:solidFill>
+            <a:prstDash val="solid"/>
+          </a:ln>
+        </p:spPr>
+      </p:sp>
+      <p:sp>
+        <p:nvSpPr>
+          <p:cNvPr id="9" name="Shape 7"/>
+          <p:cNvSpPr/>
+          <p:nvPr/>
+        </p:nvSpPr>
+        <p:spPr>
+          <a:xfrm>
+            <a:off x="548640" y="1024128"/>
+            <a:ext cx="11091672" cy="1572768"/>
+          </a:xfrm>
+          <a:prstGeom prst="rect">
+            <a:avLst/>
+          </a:prstGeom>
+          <a:ln w="11430">
+            <a:solidFill>
+              <a:srgbClr val="C9C9CF"/>
+            </a:solidFill>
+            <a:prstDash val="solid"/>
+          </a:ln>
+        </p:spPr>
+      </p:sp>
+      <p:sp>
+        <p:nvSpPr>
+          <p:cNvPr id="10" name="Text 8"/>
+          <p:cNvSpPr txBox="1"/>
+          <p:nvPr/>
+        </p:nvSpPr>
+        <p:spPr>
+          <a:xfrm>
+            <a:off x="685800" y="1097280"/>
+            <a:ext cx="274320" cy="274320"/>
+          </a:xfrm>
+          <a:prstGeom prst="rect">
+            <a:avLst/>
+          </a:prstGeom>
+          <a:noFill/>
+          <a:ln/>
+        </p:spPr>
+        <p:txBody>
+          <a:bodyPr wrap="square" lIns="0" tIns="0" rIns="0" bIns="0" rtlCol="0" anchor="ctr"/>
+          <a:lstStyle/>
+          <a:p>
+            <a:pPr indent="0" marL="0">
+              <a:buNone/>
+            </a:pPr>
+            <a:r>
+              <a:rPr lang="en-US" sz="1500" b="1" dirty="0">
+                <a:solidFill>
+                  <a:srgbClr val="8C3A2B"/>
+                </a:solidFill>
+                <a:latin typeface="Cambria" pitchFamily="34" charset="0"/>
+                <a:ea typeface="Cambria" pitchFamily="34" charset="-122"/>
+                <a:cs typeface="Cambria" pitchFamily="34" charset="-120"/>
+              </a:rPr>
+              <a:t>1</a:t>
+            </a:r>
+            <a:endParaRPr lang="en-US" sz="1500" dirty="0"/>
+          </a:p>
+        </p:txBody>
+      </p:sp>
+      <p:sp>
+        <p:nvSpPr>
+          <p:cNvPr id="11" name="Text 9"/>
+          <p:cNvSpPr txBox="1"/>
+          <p:nvPr/>
+        </p:nvSpPr>
+        <p:spPr>
+          <a:xfrm>
+            <a:off x="1005840" y="1133856"/>
+            <a:ext cx="2743200" cy="219456"/>
+          </a:xfrm>
+          <a:prstGeom prst="rect">
+            <a:avLst/>
+          </a:prstGeom>
+          <a:noFill/>
+          <a:ln/>
+        </p:spPr>
+        <p:txBody>
+          <a:bodyPr wrap="square" lIns="0" tIns="0" rIns="0" bIns="0" rtlCol="0" anchor="ctr"/>
+          <a:lstStyle/>
+          <a:p>
+            <a:pPr indent="0" marL="0">
+              <a:buNone/>
+            </a:pPr>
+            <a:r>
+              <a:rPr lang="en-US" sz="900" b="1" spc="140" kern="0" dirty="0">
+                <a:solidFill>
+                  <a:srgbClr val="8C3A2B"/>
+                </a:solidFill>
+                <a:latin typeface="Calibri" pitchFamily="34" charset="0"/>
+                <a:ea typeface="Calibri" pitchFamily="34" charset="-122"/>
+                <a:cs typeface="Calibri" pitchFamily="34" charset="-120"/>
+              </a:rPr>
+              <a:t>AYRIŞMA HARİTASI</a:t>
+            </a:r>
+            <a:endParaRPr lang="en-US" sz="900" dirty="0"/>
+          </a:p>
+        </p:txBody>
+      </p:sp>
+      <p:sp>
+        <p:nvSpPr>
+          <p:cNvPr id="12" name="Text 10"/>
+          <p:cNvSpPr txBox="1"/>
+          <p:nvPr/>
+        </p:nvSpPr>
+        <p:spPr>
+          <a:xfrm>
+            <a:off x="3931920" y="1133856"/>
+            <a:ext cx="7589520" cy="219456"/>
+          </a:xfrm>
+          <a:prstGeom prst="rect">
+            <a:avLst/>
+          </a:prstGeom>
+          <a:noFill/>
+          <a:ln/>
+        </p:spPr>
+        <p:txBody>
+          <a:bodyPr wrap="square" lIns="0" tIns="0" rIns="0" bIns="0" rtlCol="0" anchor="ctr"/>
+          <a:lstStyle/>
+          <a:p>
+            <a:pPr indent="0" marL="0">
+              <a:buNone/>
+            </a:pPr>
+            <a:r>
+              <a:rPr lang="en-US" sz="900" i="1" dirty="0">
+                <a:solidFill>
+                  <a:srgbClr val="7A7A82"/>
+                </a:solidFill>
+                <a:latin typeface="Calibri" pitchFamily="34" charset="0"/>
+                <a:ea typeface="Calibri" pitchFamily="34" charset="-122"/>
+                <a:cs typeface="Calibri" pitchFamily="34" charset="-120"/>
+              </a:rPr>
+              <a:t>Dört kâğıdı yan yana koyun. Çözmeye çalışmayın — sadece nerede aynı, nerede farklı okuduğunuzu yazın.</a:t>
+            </a:r>
+            <a:endParaRPr lang="en-US" sz="900" dirty="0"/>
+          </a:p>
+        </p:txBody>
+      </p:sp>
+      <p:sp>
+        <p:nvSpPr>
+          <p:cNvPr id="13" name="Text 11"/>
+          <p:cNvSpPr txBox="1"/>
+          <p:nvPr/>
+        </p:nvSpPr>
+        <p:spPr>
+          <a:xfrm>
+            <a:off x="777240" y="1426464"/>
+            <a:ext cx="5029200" cy="201168"/>
+          </a:xfrm>
+          <a:prstGeom prst="rect">
+            <a:avLst/>
+          </a:prstGeom>
+          <a:noFill/>
+          <a:ln/>
+        </p:spPr>
+        <p:txBody>
+          <a:bodyPr wrap="square" lIns="0" tIns="0" rIns="0" bIns="0" rtlCol="0" anchor="ctr"/>
+          <a:lstStyle/>
+          <a:p>
+            <a:pPr indent="0" marL="0">
+              <a:buNone/>
+            </a:pPr>
+            <a:r>
+              <a:rPr lang="en-US" sz="800" b="1" spc="120" kern="0" dirty="0">
+                <a:solidFill>
+                  <a:srgbClr val="A6A6AC"/>
+                </a:solidFill>
+                <a:latin typeface="Calibri" pitchFamily="34" charset="0"/>
+                <a:ea typeface="Calibri" pitchFamily="34" charset="-122"/>
+                <a:cs typeface="Calibri" pitchFamily="34" charset="-120"/>
+              </a:rPr>
+              <a:t>DÖRDÜMÜZ DE AYNI ŞEYİ GÖRDÜK</a:t>
+            </a:r>
+            <a:endParaRPr lang="en-US" sz="800" dirty="0"/>
+          </a:p>
+        </p:txBody>
+      </p:sp>
+      <p:sp>
+        <p:nvSpPr>
+          <p:cNvPr id="14" name="Text 12"/>
+          <p:cNvSpPr txBox="1"/>
+          <p:nvPr/>
+        </p:nvSpPr>
+        <p:spPr>
+          <a:xfrm>
+            <a:off x="6355080" y="1426464"/>
+            <a:ext cx="5120640" cy="201168"/>
+          </a:xfrm>
+          <a:prstGeom prst="rect">
+            <a:avLst/>
+          </a:prstGeom>
+          <a:noFill/>
+          <a:ln/>
+        </p:spPr>
+        <p:txBody>
+          <a:bodyPr wrap="square" lIns="0" tIns="0" rIns="0" bIns="0" rtlCol="0" anchor="ctr"/>
+          <a:lstStyle/>
+          <a:p>
+            <a:pPr indent="0" marL="0">
+              <a:buNone/>
+            </a:pPr>
+            <a:r>
+              <a:rPr lang="en-US" sz="800" b="1" spc="120" kern="0" dirty="0">
+                <a:solidFill>
+                  <a:srgbClr val="8C3A2B"/>
+                </a:solidFill>
+                <a:latin typeface="Calibri" pitchFamily="34" charset="0"/>
+                <a:ea typeface="Calibri" pitchFamily="34" charset="-122"/>
+                <a:cs typeface="Calibri" pitchFamily="34" charset="-120"/>
+              </a:rPr>
+              <a:t>AYRI OKUDUĞUMUZ YERLER  —  ve her okumanın dayandığı kanıt</a:t>
+            </a:r>
+            <a:endParaRPr lang="en-US" sz="800" dirty="0"/>
+          </a:p>
+        </p:txBody>
+      </p:sp>
+      <p:sp>
+        <p:nvSpPr>
+          <p:cNvPr id="15" name="Shape 13"/>
+          <p:cNvSpPr/>
+          <p:nvPr/>
+        </p:nvSpPr>
+        <p:spPr>
+          <a:xfrm>
+            <a:off x="6144768" y="1371600"/>
+            <a:ext cx="0" cy="1133856"/>
+          </a:xfrm>
+          <a:prstGeom prst="line">
+            <a:avLst/>
+          </a:prstGeom>
+          <a:noFill/>
+          <a:ln w="11430">
+            <a:solidFill>
+              <a:srgbClr val="C9C9CF"/>
+            </a:solidFill>
+            <a:prstDash val="solid"/>
+          </a:ln>
+        </p:spPr>
+      </p:sp>
+      <p:sp>
+        <p:nvSpPr>
+          <p:cNvPr id="16" name="Shape 14"/>
+          <p:cNvSpPr/>
+          <p:nvPr/>
+        </p:nvSpPr>
+        <p:spPr>
+          <a:xfrm>
+            <a:off x="777240" y="1828800"/>
+            <a:ext cx="5166360" cy="0"/>
+          </a:xfrm>
+          <a:prstGeom prst="line">
+            <a:avLst/>
+          </a:prstGeom>
+          <a:noFill/>
+          <a:ln w="9525">
+            <a:solidFill>
+              <a:srgbClr val="E4E4E8"/>
+            </a:solidFill>
+            <a:prstDash val="solid"/>
+          </a:ln>
+        </p:spPr>
+      </p:sp>
+      <p:sp>
+        <p:nvSpPr>
+          <p:cNvPr id="17" name="Shape 15"/>
+          <p:cNvSpPr/>
+          <p:nvPr/>
+        </p:nvSpPr>
+        <p:spPr>
+          <a:xfrm>
+            <a:off x="6355080" y="1828800"/>
+            <a:ext cx="5074920" cy="0"/>
+          </a:xfrm>
+          <a:prstGeom prst="line">
+            <a:avLst/>
+          </a:prstGeom>
+          <a:noFill/>
+          <a:ln w="9525">
+            <a:solidFill>
+              <a:srgbClr val="E4E4E8"/>
+            </a:solidFill>
+            <a:prstDash val="solid"/>
+          </a:ln>
+        </p:spPr>
+      </p:sp>
+      <p:sp>
+        <p:nvSpPr>
+          <p:cNvPr id="18" name="Shape 16"/>
+          <p:cNvSpPr/>
+          <p:nvPr/>
+        </p:nvSpPr>
+        <p:spPr>
+          <a:xfrm>
+            <a:off x="777240" y="2057400"/>
+            <a:ext cx="5166360" cy="0"/>
+          </a:xfrm>
+          <a:prstGeom prst="line">
+            <a:avLst/>
+          </a:prstGeom>
+          <a:noFill/>
+          <a:ln w="9525">
+            <a:solidFill>
+              <a:srgbClr val="E4E4E8"/>
+            </a:solidFill>
+            <a:prstDash val="solid"/>
+          </a:ln>
+        </p:spPr>
+      </p:sp>
+      <p:sp>
+        <p:nvSpPr>
+          <p:cNvPr id="19" name="Shape 17"/>
+          <p:cNvSpPr/>
+          <p:nvPr/>
+        </p:nvSpPr>
+        <p:spPr>
+          <a:xfrm>
+            <a:off x="6355080" y="2057400"/>
+            <a:ext cx="5074920" cy="0"/>
+          </a:xfrm>
+          <a:prstGeom prst="line">
+            <a:avLst/>
+          </a:prstGeom>
+          <a:noFill/>
+          <a:ln w="9525">
+            <a:solidFill>
+              <a:srgbClr val="E4E4E8"/>
+            </a:solidFill>
+            <a:prstDash val="solid"/>
+          </a:ln>
+        </p:spPr>
+      </p:sp>
+      <p:sp>
+        <p:nvSpPr>
+          <p:cNvPr id="20" name="Shape 18"/>
+          <p:cNvSpPr/>
+          <p:nvPr/>
+        </p:nvSpPr>
+        <p:spPr>
+          <a:xfrm>
+            <a:off x="777240" y="2286000"/>
+            <a:ext cx="5166360" cy="0"/>
+          </a:xfrm>
+          <a:prstGeom prst="line">
+            <a:avLst/>
+          </a:prstGeom>
+          <a:noFill/>
+          <a:ln w="9525">
+            <a:solidFill>
+              <a:srgbClr val="E4E4E8"/>
+            </a:solidFill>
+            <a:prstDash val="solid"/>
+          </a:ln>
+        </p:spPr>
+      </p:sp>
+      <p:sp>
+        <p:nvSpPr>
+          <p:cNvPr id="21" name="Shape 19"/>
+          <p:cNvSpPr/>
+          <p:nvPr/>
+        </p:nvSpPr>
+        <p:spPr>
+          <a:xfrm>
+            <a:off x="6355080" y="2286000"/>
+            <a:ext cx="5074920" cy="0"/>
+          </a:xfrm>
+          <a:prstGeom prst="line">
+            <a:avLst/>
+          </a:prstGeom>
+          <a:noFill/>
+          <a:ln w="9525">
+            <a:solidFill>
+              <a:srgbClr val="E4E4E8"/>
+            </a:solidFill>
+            <a:prstDash val="solid"/>
+          </a:ln>
+        </p:spPr>
+      </p:sp>
+      <p:sp>
+        <p:nvSpPr>
+          <p:cNvPr id="22" name="Shape 20"/>
+          <p:cNvSpPr/>
+          <p:nvPr/>
+        </p:nvSpPr>
+        <p:spPr>
+          <a:xfrm>
+            <a:off x="548640" y="2724912"/>
+            <a:ext cx="6675120" cy="2286000"/>
+          </a:xfrm>
+          <a:prstGeom prst="rect">
+            <a:avLst/>
+          </a:prstGeom>
+          <a:ln w="11430">
+            <a:solidFill>
+              <a:srgbClr val="C9C9CF"/>
+            </a:solidFill>
+            <a:prstDash val="solid"/>
+          </a:ln>
+        </p:spPr>
+      </p:sp>
+      <p:sp>
+        <p:nvSpPr>
+          <p:cNvPr id="23" name="Text 21"/>
+          <p:cNvSpPr txBox="1"/>
+          <p:nvPr/>
+        </p:nvSpPr>
+        <p:spPr>
+          <a:xfrm>
+            <a:off x="685800" y="2798064"/>
+            <a:ext cx="274320" cy="274320"/>
+          </a:xfrm>
+          <a:prstGeom prst="rect">
+            <a:avLst/>
+          </a:prstGeom>
+          <a:noFill/>
+          <a:ln/>
+        </p:spPr>
+        <p:txBody>
+          <a:bodyPr wrap="square" lIns="0" tIns="0" rIns="0" bIns="0" rtlCol="0" anchor="ctr"/>
+          <a:lstStyle/>
+          <a:p>
+            <a:pPr indent="0" marL="0">
+              <a:buNone/>
+            </a:pPr>
+            <a:r>
+              <a:rPr lang="en-US" sz="1500" b="1" dirty="0">
+                <a:solidFill>
+                  <a:srgbClr val="8C3A2B"/>
+                </a:solidFill>
+                <a:latin typeface="Cambria" pitchFamily="34" charset="0"/>
+                <a:ea typeface="Cambria" pitchFamily="34" charset="-122"/>
+                <a:cs typeface="Cambria" pitchFamily="34" charset="-120"/>
+              </a:rPr>
+              <a:t>2</a:t>
+            </a:r>
+            <a:endParaRPr lang="en-US" sz="1500" dirty="0"/>
+          </a:p>
+        </p:txBody>
+      </p:sp>
+      <p:sp>
+        <p:nvSpPr>
+          <p:cNvPr id="24" name="Text 22"/>
+          <p:cNvSpPr txBox="1"/>
+          <p:nvPr/>
+        </p:nvSpPr>
+        <p:spPr>
+          <a:xfrm>
+            <a:off x="1005840" y="2834640"/>
+            <a:ext cx="2926080" cy="219456"/>
+          </a:xfrm>
+          <a:prstGeom prst="rect">
+            <a:avLst/>
+          </a:prstGeom>
+          <a:noFill/>
+          <a:ln/>
+        </p:spPr>
+        <p:txBody>
+          <a:bodyPr wrap="square" lIns="0" tIns="0" rIns="0" bIns="0" rtlCol="0" anchor="ctr"/>
+          <a:lstStyle/>
+          <a:p>
+            <a:pPr indent="0" marL="0">
+              <a:buNone/>
+            </a:pPr>
+            <a:r>
+              <a:rPr lang="en-US" sz="900" b="1" spc="140" kern="0" dirty="0">
+                <a:solidFill>
+                  <a:srgbClr val="8C3A2B"/>
+                </a:solidFill>
+                <a:latin typeface="Calibri" pitchFamily="34" charset="0"/>
+                <a:ea typeface="Calibri" pitchFamily="34" charset="-122"/>
+                <a:cs typeface="Calibri" pitchFamily="34" charset="-120"/>
+              </a:rPr>
+              <a:t>ON İKİ KELİMEDEN ÜÇE</a:t>
+            </a:r>
+            <a:endParaRPr lang="en-US" sz="900" dirty="0"/>
+          </a:p>
+        </p:txBody>
+      </p:sp>
+      <p:sp>
+        <p:nvSpPr>
+          <p:cNvPr id="25" name="Text 23"/>
+          <p:cNvSpPr txBox="1"/>
+          <p:nvPr/>
+        </p:nvSpPr>
+        <p:spPr>
+          <a:xfrm>
+            <a:off x="777240" y="3090672"/>
+            <a:ext cx="6217920" cy="219456"/>
+          </a:xfrm>
+          <a:prstGeom prst="rect">
+            <a:avLst/>
+          </a:prstGeom>
+          <a:noFill/>
+          <a:ln/>
+        </p:spPr>
+        <p:txBody>
+          <a:bodyPr wrap="square" lIns="0" tIns="0" rIns="0" bIns="0" rtlCol="0" anchor="ctr"/>
+          <a:lstStyle/>
+          <a:p>
+            <a:pPr indent="0" marL="0">
+              <a:buNone/>
+            </a:pPr>
+            <a:r>
+              <a:rPr lang="en-US" sz="850" i="1" dirty="0">
+                <a:solidFill>
+                  <a:srgbClr val="7A7A82"/>
+                </a:solidFill>
+                <a:latin typeface="Calibri" pitchFamily="34" charset="0"/>
+                <a:ea typeface="Calibri" pitchFamily="34" charset="-122"/>
+                <a:cs typeface="Calibri" pitchFamily="34" charset="-120"/>
+              </a:rPr>
+              <a:t>Dördünüzün kelimelerini birleştirin, sonra üçe indirin. Kanıtı olmayan kelime elenir.</a:t>
+            </a:r>
+            <a:endParaRPr lang="en-US" sz="850" dirty="0"/>
+          </a:p>
+        </p:txBody>
+      </p:sp>
+      <p:sp>
+        <p:nvSpPr>
+          <p:cNvPr id="26" name="Text 24"/>
+          <p:cNvSpPr txBox="1"/>
+          <p:nvPr/>
+        </p:nvSpPr>
+        <p:spPr>
+          <a:xfrm>
+            <a:off x="777240" y="3346704"/>
+            <a:ext cx="731520" cy="182880"/>
+          </a:xfrm>
+          <a:prstGeom prst="rect">
+            <a:avLst/>
+          </a:prstGeom>
+          <a:noFill/>
+          <a:ln/>
+        </p:spPr>
+        <p:txBody>
+          <a:bodyPr wrap="square" lIns="0" tIns="0" rIns="0" bIns="0" rtlCol="0" anchor="ctr"/>
+          <a:lstStyle/>
+          <a:p>
+            <a:pPr indent="0" marL="0">
+              <a:buNone/>
+            </a:pPr>
+            <a:r>
+              <a:rPr lang="en-US" sz="750" b="1" spc="120" kern="0" dirty="0">
+                <a:solidFill>
+                  <a:srgbClr val="A6A6AC"/>
+                </a:solidFill>
+                <a:latin typeface="Calibri" pitchFamily="34" charset="0"/>
+                <a:ea typeface="Calibri" pitchFamily="34" charset="-122"/>
+                <a:cs typeface="Calibri" pitchFamily="34" charset="-120"/>
+              </a:rPr>
+              <a:t>HAVUZ</a:t>
+            </a:r>
+            <a:endParaRPr lang="en-US" sz="750" dirty="0"/>
+          </a:p>
+        </p:txBody>
+      </p:sp>
+      <p:sp>
+        <p:nvSpPr>
+          <p:cNvPr id="27" name="Shape 25"/>
+          <p:cNvSpPr/>
+          <p:nvPr/>
+        </p:nvSpPr>
+        <p:spPr>
+          <a:xfrm>
+            <a:off x="1554480" y="3511296"/>
+            <a:ext cx="5440680" cy="0"/>
+          </a:xfrm>
+          <a:prstGeom prst="line">
+            <a:avLst/>
+          </a:prstGeom>
+          <a:noFill/>
+          <a:ln w="9525">
+            <a:solidFill>
+              <a:srgbClr val="E4E4E8"/>
+            </a:solidFill>
+            <a:prstDash val="solid"/>
+          </a:ln>
+        </p:spPr>
+      </p:sp>
+      <p:sp>
+        <p:nvSpPr>
+          <p:cNvPr id="28" name="Text 26"/>
+          <p:cNvSpPr txBox="1"/>
+          <p:nvPr/>
+        </p:nvSpPr>
+        <p:spPr>
+          <a:xfrm>
+            <a:off x="777240" y="3694176"/>
+            <a:ext cx="228600" cy="219456"/>
+          </a:xfrm>
+          <a:prstGeom prst="rect">
+            <a:avLst/>
+          </a:prstGeom>
+          <a:noFill/>
+          <a:ln/>
+        </p:spPr>
+        <p:txBody>
+          <a:bodyPr wrap="square" lIns="0" tIns="0" rIns="0" bIns="0" rtlCol="0" anchor="ctr"/>
+          <a:lstStyle/>
+          <a:p>
+            <a:pPr indent="0" marL="0">
+              <a:buNone/>
+            </a:pPr>
+            <a:r>
+              <a:rPr lang="en-US" sz="1200" b="1" dirty="0">
+                <a:solidFill>
+                  <a:srgbClr val="A6A6AC"/>
+                </a:solidFill>
+                <a:latin typeface="Cambria" pitchFamily="34" charset="0"/>
+                <a:ea typeface="Cambria" pitchFamily="34" charset="-122"/>
+                <a:cs typeface="Cambria" pitchFamily="34" charset="-120"/>
+              </a:rPr>
+              <a:t>1</a:t>
+            </a:r>
+            <a:endParaRPr lang="en-US" sz="1200" dirty="0"/>
+          </a:p>
+        </p:txBody>
+      </p:sp>
+      <p:sp>
+        <p:nvSpPr>
+          <p:cNvPr id="29" name="Shape 27"/>
+          <p:cNvSpPr/>
+          <p:nvPr/>
+        </p:nvSpPr>
+        <p:spPr>
+          <a:xfrm>
+            <a:off x="1051560" y="3913632"/>
+            <a:ext cx="2148840" cy="0"/>
+          </a:xfrm>
+          <a:prstGeom prst="line">
+            <a:avLst/>
+          </a:prstGeom>
+          <a:noFill/>
+          <a:ln w="11430">
+            <a:solidFill>
+              <a:srgbClr val="7A7A82"/>
+            </a:solidFill>
+            <a:prstDash val="solid"/>
+          </a:ln>
+        </p:spPr>
+      </p:sp>
+      <p:sp>
+        <p:nvSpPr>
+          <p:cNvPr id="30" name="Text 28"/>
+          <p:cNvSpPr txBox="1"/>
+          <p:nvPr/>
+        </p:nvSpPr>
+        <p:spPr>
+          <a:xfrm>
+            <a:off x="3310128" y="3712464"/>
+            <a:ext cx="457200" cy="182880"/>
+          </a:xfrm>
+          <a:prstGeom prst="rect">
+            <a:avLst/>
+          </a:prstGeom>
+          <a:noFill/>
+          <a:ln/>
+        </p:spPr>
+        <p:txBody>
+          <a:bodyPr wrap="square" lIns="0" tIns="0" rIns="0" bIns="0" rtlCol="0" anchor="ctr"/>
+          <a:lstStyle/>
+          <a:p>
+            <a:pPr indent="0" marL="0">
+              <a:buNone/>
+            </a:pPr>
+            <a:r>
+              <a:rPr lang="en-US" sz="750" i="1" dirty="0">
+                <a:solidFill>
+                  <a:srgbClr val="A6A6AC"/>
+                </a:solidFill>
+                <a:latin typeface="Calibri" pitchFamily="34" charset="0"/>
+                <a:ea typeface="Calibri" pitchFamily="34" charset="-122"/>
+                <a:cs typeface="Calibri" pitchFamily="34" charset="-120"/>
+              </a:rPr>
+              <a:t>kanıt</a:t>
+            </a:r>
+            <a:endParaRPr lang="en-US" sz="750" dirty="0"/>
+          </a:p>
+        </p:txBody>
+      </p:sp>
+      <p:sp>
+        <p:nvSpPr>
+          <p:cNvPr id="31" name="Shape 29"/>
+          <p:cNvSpPr/>
+          <p:nvPr/>
+        </p:nvSpPr>
+        <p:spPr>
+          <a:xfrm>
+            <a:off x="3794760" y="3913632"/>
+            <a:ext cx="3200400" cy="0"/>
+          </a:xfrm>
+          <a:prstGeom prst="line">
+            <a:avLst/>
+          </a:prstGeom>
+          <a:noFill/>
+          <a:ln w="9525">
+            <a:solidFill>
+              <a:srgbClr val="E4E4E8"/>
+            </a:solidFill>
+            <a:prstDash val="solid"/>
+          </a:ln>
+        </p:spPr>
+      </p:sp>
+      <p:sp>
+        <p:nvSpPr>
+          <p:cNvPr id="32" name="Text 30"/>
+          <p:cNvSpPr txBox="1"/>
+          <p:nvPr/>
+        </p:nvSpPr>
+        <p:spPr>
+          <a:xfrm>
+            <a:off x="777240" y="4114800"/>
+            <a:ext cx="228600" cy="219456"/>
+          </a:xfrm>
+          <a:prstGeom prst="rect">
+            <a:avLst/>
+          </a:prstGeom>
+          <a:noFill/>
+          <a:ln/>
+        </p:spPr>
+        <p:txBody>
+          <a:bodyPr wrap="square" lIns="0" tIns="0" rIns="0" bIns="0" rtlCol="0" anchor="ctr"/>
+          <a:lstStyle/>
+          <a:p>
+            <a:pPr indent="0" marL="0">
+              <a:buNone/>
+            </a:pPr>
+            <a:r>
+              <a:rPr lang="en-US" sz="1200" b="1" dirty="0">
+                <a:solidFill>
+                  <a:srgbClr val="A6A6AC"/>
+                </a:solidFill>
+                <a:latin typeface="Cambria" pitchFamily="34" charset="0"/>
+                <a:ea typeface="Cambria" pitchFamily="34" charset="-122"/>
+                <a:cs typeface="Cambria" pitchFamily="34" charset="-120"/>
+              </a:rPr>
+              <a:t>2</a:t>
+            </a:r>
+            <a:endParaRPr lang="en-US" sz="1200" dirty="0"/>
+          </a:p>
+        </p:txBody>
+      </p:sp>
+      <p:sp>
+        <p:nvSpPr>
+          <p:cNvPr id="33" name="Shape 31"/>
+          <p:cNvSpPr/>
+          <p:nvPr/>
+        </p:nvSpPr>
+        <p:spPr>
+          <a:xfrm>
+            <a:off x="1051560" y="4334256"/>
+            <a:ext cx="2148840" cy="0"/>
+          </a:xfrm>
+          <a:prstGeom prst="line">
+            <a:avLst/>
+          </a:prstGeom>
+          <a:noFill/>
+          <a:ln w="11430">
+            <a:solidFill>
+              <a:srgbClr val="7A7A82"/>
+            </a:solidFill>
+            <a:prstDash val="solid"/>
+          </a:ln>
+        </p:spPr>
+      </p:sp>
+      <p:sp>
+        <p:nvSpPr>
+          <p:cNvPr id="34" name="Text 32"/>
+          <p:cNvSpPr txBox="1"/>
+          <p:nvPr/>
+        </p:nvSpPr>
+        <p:spPr>
+          <a:xfrm>
+            <a:off x="3310128" y="4133088"/>
+            <a:ext cx="457200" cy="182880"/>
+          </a:xfrm>
+          <a:prstGeom prst="rect">
+            <a:avLst/>
+          </a:prstGeom>
+          <a:noFill/>
+          <a:ln/>
+        </p:spPr>
+        <p:txBody>
+          <a:bodyPr wrap="square" lIns="0" tIns="0" rIns="0" bIns="0" rtlCol="0" anchor="ctr"/>
+          <a:lstStyle/>
+          <a:p>
+            <a:pPr indent="0" marL="0">
+              <a:buNone/>
+            </a:pPr>
+            <a:r>
+              <a:rPr lang="en-US" sz="750" i="1" dirty="0">
+                <a:solidFill>
+                  <a:srgbClr val="A6A6AC"/>
+                </a:solidFill>
+                <a:latin typeface="Calibri" pitchFamily="34" charset="0"/>
+                <a:ea typeface="Calibri" pitchFamily="34" charset="-122"/>
+                <a:cs typeface="Calibri" pitchFamily="34" charset="-120"/>
+              </a:rPr>
+              <a:t>kanıt</a:t>
+            </a:r>
+            <a:endParaRPr lang="en-US" sz="750" dirty="0"/>
+          </a:p>
+        </p:txBody>
+      </p:sp>
+      <p:sp>
+        <p:nvSpPr>
+          <p:cNvPr id="35" name="Shape 33"/>
+          <p:cNvSpPr/>
+          <p:nvPr/>
+        </p:nvSpPr>
+        <p:spPr>
+          <a:xfrm>
+            <a:off x="3794760" y="4334256"/>
+            <a:ext cx="3200400" cy="0"/>
+          </a:xfrm>
+          <a:prstGeom prst="line">
+            <a:avLst/>
+          </a:prstGeom>
+          <a:noFill/>
+          <a:ln w="9525">
+            <a:solidFill>
+              <a:srgbClr val="E4E4E8"/>
+            </a:solidFill>
+            <a:prstDash val="solid"/>
+          </a:ln>
+        </p:spPr>
+      </p:sp>
+      <p:sp>
+        <p:nvSpPr>
+          <p:cNvPr id="36" name="Text 34"/>
+          <p:cNvSpPr txBox="1"/>
+          <p:nvPr/>
+        </p:nvSpPr>
+        <p:spPr>
+          <a:xfrm>
+            <a:off x="777240" y="4535424"/>
+            <a:ext cx="228600" cy="219456"/>
+          </a:xfrm>
+          <a:prstGeom prst="rect">
+            <a:avLst/>
+          </a:prstGeom>
+          <a:noFill/>
+          <a:ln/>
+        </p:spPr>
+        <p:txBody>
+          <a:bodyPr wrap="square" lIns="0" tIns="0" rIns="0" bIns="0" rtlCol="0" anchor="ctr"/>
+          <a:lstStyle/>
+          <a:p>
+            <a:pPr indent="0" marL="0">
+              <a:buNone/>
+            </a:pPr>
+            <a:r>
+              <a:rPr lang="en-US" sz="1200" b="1" dirty="0">
+                <a:solidFill>
+                  <a:srgbClr val="A6A6AC"/>
+                </a:solidFill>
+                <a:latin typeface="Cambria" pitchFamily="34" charset="0"/>
+                <a:ea typeface="Cambria" pitchFamily="34" charset="-122"/>
+                <a:cs typeface="Cambria" pitchFamily="34" charset="-120"/>
+              </a:rPr>
+              <a:t>3</a:t>
+            </a:r>
+            <a:endParaRPr lang="en-US" sz="1200" dirty="0"/>
+          </a:p>
+        </p:txBody>
+      </p:sp>
+      <p:sp>
+        <p:nvSpPr>
+          <p:cNvPr id="37" name="Shape 35"/>
+          <p:cNvSpPr/>
+          <p:nvPr/>
+        </p:nvSpPr>
+        <p:spPr>
+          <a:xfrm>
+            <a:off x="1051560" y="4754880"/>
+            <a:ext cx="2148840" cy="0"/>
+          </a:xfrm>
+          <a:prstGeom prst="line">
+            <a:avLst/>
+          </a:prstGeom>
+          <a:noFill/>
+          <a:ln w="11430">
+            <a:solidFill>
+              <a:srgbClr val="7A7A82"/>
+            </a:solidFill>
+            <a:prstDash val="solid"/>
+          </a:ln>
+        </p:spPr>
+      </p:sp>
+      <p:sp>
+        <p:nvSpPr>
+          <p:cNvPr id="38" name="Text 36"/>
+          <p:cNvSpPr txBox="1"/>
+          <p:nvPr/>
+        </p:nvSpPr>
+        <p:spPr>
+          <a:xfrm>
+            <a:off x="3310128" y="4553712"/>
+            <a:ext cx="457200" cy="182880"/>
+          </a:xfrm>
+          <a:prstGeom prst="rect">
+            <a:avLst/>
+          </a:prstGeom>
+          <a:noFill/>
+          <a:ln/>
+        </p:spPr>
+        <p:txBody>
+          <a:bodyPr wrap="square" lIns="0" tIns="0" rIns="0" bIns="0" rtlCol="0" anchor="ctr"/>
+          <a:lstStyle/>
+          <a:p>
+            <a:pPr indent="0" marL="0">
+              <a:buNone/>
+            </a:pPr>
+            <a:r>
+              <a:rPr lang="en-US" sz="750" i="1" dirty="0">
+                <a:solidFill>
+                  <a:srgbClr val="A6A6AC"/>
+                </a:solidFill>
+                <a:latin typeface="Calibri" pitchFamily="34" charset="0"/>
+                <a:ea typeface="Calibri" pitchFamily="34" charset="-122"/>
+                <a:cs typeface="Calibri" pitchFamily="34" charset="-120"/>
+              </a:rPr>
+              <a:t>kanıt</a:t>
+            </a:r>
+            <a:endParaRPr lang="en-US" sz="750" dirty="0"/>
+          </a:p>
+        </p:txBody>
+      </p:sp>
+      <p:sp>
+        <p:nvSpPr>
+          <p:cNvPr id="39" name="Shape 37"/>
+          <p:cNvSpPr/>
+          <p:nvPr/>
+        </p:nvSpPr>
+        <p:spPr>
+          <a:xfrm>
+            <a:off x="3794760" y="4754880"/>
+            <a:ext cx="3200400" cy="0"/>
+          </a:xfrm>
+          <a:prstGeom prst="line">
+            <a:avLst/>
+          </a:prstGeom>
+          <a:noFill/>
+          <a:ln w="9525">
+            <a:solidFill>
+              <a:srgbClr val="E4E4E8"/>
+            </a:solidFill>
+            <a:prstDash val="solid"/>
+          </a:ln>
+        </p:spPr>
+      </p:sp>
+      <p:sp>
+        <p:nvSpPr>
+          <p:cNvPr id="40" name="Shape 38"/>
+          <p:cNvSpPr/>
+          <p:nvPr/>
+        </p:nvSpPr>
+        <p:spPr>
+          <a:xfrm>
+            <a:off x="7498080" y="2724912"/>
+            <a:ext cx="4142232" cy="2286000"/>
+          </a:xfrm>
+          <a:prstGeom prst="rect">
+            <a:avLst/>
+          </a:prstGeom>
+          <a:solidFill>
+            <a:srgbClr val="F6EAE6"/>
+          </a:solidFill>
+          <a:ln w="13970">
+            <a:solidFill>
+              <a:srgbClr val="8C3A2B"/>
+            </a:solidFill>
+            <a:prstDash val="solid"/>
+          </a:ln>
+        </p:spPr>
+      </p:sp>
+      <p:sp>
+        <p:nvSpPr>
+          <p:cNvPr id="41" name="Text 39"/>
+          <p:cNvSpPr txBox="1"/>
+          <p:nvPr/>
+        </p:nvSpPr>
+        <p:spPr>
+          <a:xfrm>
+            <a:off x="7635240" y="2798064"/>
+            <a:ext cx="274320" cy="274320"/>
+          </a:xfrm>
+          <a:prstGeom prst="rect">
+            <a:avLst/>
+          </a:prstGeom>
+          <a:noFill/>
+          <a:ln/>
+        </p:spPr>
+        <p:txBody>
+          <a:bodyPr wrap="square" lIns="0" tIns="0" rIns="0" bIns="0" rtlCol="0" anchor="ctr"/>
+          <a:lstStyle/>
+          <a:p>
+            <a:pPr indent="0" marL="0">
+              <a:buNone/>
+            </a:pPr>
+            <a:r>
+              <a:rPr lang="en-US" sz="1500" b="1" dirty="0">
+                <a:solidFill>
+                  <a:srgbClr val="8C3A2B"/>
+                </a:solidFill>
+                <a:latin typeface="Cambria" pitchFamily="34" charset="0"/>
+                <a:ea typeface="Cambria" pitchFamily="34" charset="-122"/>
+                <a:cs typeface="Cambria" pitchFamily="34" charset="-120"/>
+              </a:rPr>
+              <a:t>3</a:t>
+            </a:r>
+            <a:endParaRPr lang="en-US" sz="1500" dirty="0"/>
+          </a:p>
+        </p:txBody>
+      </p:sp>
+      <p:sp>
+        <p:nvSpPr>
+          <p:cNvPr id="42" name="Text 40"/>
+          <p:cNvSpPr txBox="1"/>
+          <p:nvPr/>
+        </p:nvSpPr>
+        <p:spPr>
+          <a:xfrm>
+            <a:off x="7955280" y="2834640"/>
+            <a:ext cx="2743200" cy="219456"/>
+          </a:xfrm>
+          <a:prstGeom prst="rect">
+            <a:avLst/>
+          </a:prstGeom>
+          <a:noFill/>
+          <a:ln/>
+        </p:spPr>
+        <p:txBody>
+          <a:bodyPr wrap="square" lIns="0" tIns="0" rIns="0" bIns="0" rtlCol="0" anchor="ctr"/>
+          <a:lstStyle/>
+          <a:p>
+            <a:pPr indent="0" marL="0">
+              <a:buNone/>
+            </a:pPr>
+            <a:r>
+              <a:rPr lang="en-US" sz="900" b="1" spc="140" kern="0" dirty="0">
+                <a:solidFill>
+                  <a:srgbClr val="8C3A2B"/>
+                </a:solidFill>
+                <a:latin typeface="Calibri" pitchFamily="34" charset="0"/>
+                <a:ea typeface="Calibri" pitchFamily="34" charset="-122"/>
+                <a:cs typeface="Calibri" pitchFamily="34" charset="-120"/>
+              </a:rPr>
+              <a:t>TEK MÜDAHALE</a:t>
+            </a:r>
+            <a:endParaRPr lang="en-US" sz="900" dirty="0"/>
+          </a:p>
+        </p:txBody>
+      </p:sp>
+      <p:sp>
+        <p:nvSpPr>
+          <p:cNvPr id="43" name="Text 41"/>
+          <p:cNvSpPr txBox="1"/>
+          <p:nvPr/>
+        </p:nvSpPr>
+        <p:spPr>
+          <a:xfrm>
+            <a:off x="7726680" y="3090672"/>
+            <a:ext cx="3685032" cy="566928"/>
+          </a:xfrm>
+          <a:prstGeom prst="rect">
+            <a:avLst/>
+          </a:prstGeom>
+          <a:noFill/>
+          <a:ln/>
+        </p:spPr>
+        <p:txBody>
+          <a:bodyPr wrap="square" lIns="0" tIns="0" rIns="0" bIns="0" rtlCol="0" anchor="ctr"/>
+          <a:lstStyle/>
+          <a:p>
+            <a:pPr indent="0" marL="0">
+              <a:lnSpc>
+                <a:spcPts val="1050"/>
+              </a:lnSpc>
+              <a:buNone/>
+            </a:pPr>
+            <a:r>
+              <a:rPr lang="en-US" sz="850" i="1" dirty="0">
+                <a:solidFill>
+                  <a:srgbClr val="7A7A82"/>
+                </a:solidFill>
+                <a:latin typeface="Calibri" pitchFamily="34" charset="0"/>
+                <a:ea typeface="Calibri" pitchFamily="34" charset="-122"/>
+                <a:cs typeface="Calibri" pitchFamily="34" charset="-120"/>
+              </a:rPr>
+              <a:t>Üç kelimenizi daha güçlü kılmak için bu mekânda tek bir şeyi değiştirebilseydiniz, neyi değiştirirdiniz? Kaba eskiz + tek cümle. Çözüm değil, karar.</a:t>
+            </a:r>
+            <a:endParaRPr lang="en-US" sz="850" dirty="0"/>
+          </a:p>
+        </p:txBody>
+      </p:sp>
+      <p:sp>
+        <p:nvSpPr>
+          <p:cNvPr id="44" name="Shape 42"/>
+          <p:cNvSpPr/>
+          <p:nvPr/>
+        </p:nvSpPr>
+        <p:spPr>
+          <a:xfrm>
+            <a:off x="7726680" y="4791456"/>
+            <a:ext cx="3685032" cy="0"/>
+          </a:xfrm>
+          <a:prstGeom prst="line">
+            <a:avLst/>
+          </a:prstGeom>
+          <a:noFill/>
+          <a:ln w="11430">
+            <a:solidFill>
+              <a:srgbClr val="7A7A82"/>
+            </a:solidFill>
+            <a:prstDash val="solid"/>
+          </a:ln>
+        </p:spPr>
+      </p:sp>
+      <p:sp>
+        <p:nvSpPr>
+          <p:cNvPr id="45" name="Text 43"/>
+          <p:cNvSpPr txBox="1"/>
+          <p:nvPr/>
+        </p:nvSpPr>
+        <p:spPr>
+          <a:xfrm>
+            <a:off x="548640" y="5175504"/>
+            <a:ext cx="5486400" cy="219456"/>
+          </a:xfrm>
+          <a:prstGeom prst="rect">
+            <a:avLst/>
+          </a:prstGeom>
+          <a:noFill/>
+          <a:ln/>
+        </p:spPr>
+        <p:txBody>
+          <a:bodyPr wrap="square" lIns="0" tIns="0" rIns="0" bIns="0" rtlCol="0" anchor="ctr"/>
+          <a:lstStyle/>
+          <a:p>
+            <a:pPr indent="0" marL="0">
+              <a:buNone/>
+            </a:pPr>
+            <a:r>
+              <a:rPr lang="en-US" sz="900" b="1" spc="140" kern="0" dirty="0">
+                <a:solidFill>
+                  <a:srgbClr val="8C3A2B"/>
+                </a:solidFill>
+                <a:latin typeface="Calibri" pitchFamily="34" charset="0"/>
+                <a:ea typeface="Calibri" pitchFamily="34" charset="-122"/>
+                <a:cs typeface="Calibri" pitchFamily="34" charset="-120"/>
+              </a:rPr>
+              <a:t>SUNUMDA ANLATACAĞINIZ ÜÇ ŞEY  ·  4 DAKİKA</a:t>
+            </a:r>
+            <a:endParaRPr lang="en-US" sz="900" dirty="0"/>
+          </a:p>
+        </p:txBody>
+      </p:sp>
+      <p:sp>
+        <p:nvSpPr>
+          <p:cNvPr id="46" name="Text 44"/>
+          <p:cNvSpPr txBox="1"/>
+          <p:nvPr/>
+        </p:nvSpPr>
+        <p:spPr>
+          <a:xfrm>
+            <a:off x="548640" y="5468112"/>
+            <a:ext cx="228600" cy="219456"/>
+          </a:xfrm>
+          <a:prstGeom prst="rect">
+            <a:avLst/>
+          </a:prstGeom>
+          <a:noFill/>
+          <a:ln/>
+        </p:spPr>
+        <p:txBody>
+          <a:bodyPr wrap="square" lIns="0" tIns="0" rIns="0" bIns="0" rtlCol="0" anchor="ctr"/>
+          <a:lstStyle/>
+          <a:p>
+            <a:pPr indent="0" marL="0">
+              <a:buNone/>
+            </a:pPr>
+            <a:r>
+              <a:rPr lang="en-US" sz="1200" b="1" dirty="0">
+                <a:solidFill>
+                  <a:srgbClr val="8C3A2B"/>
+                </a:solidFill>
+                <a:latin typeface="Cambria" pitchFamily="34" charset="0"/>
+                <a:ea typeface="Cambria" pitchFamily="34" charset="-122"/>
+                <a:cs typeface="Cambria" pitchFamily="34" charset="-120"/>
+              </a:rPr>
+              <a:t>1</a:t>
+            </a:r>
+            <a:endParaRPr lang="en-US" sz="1200" dirty="0"/>
+          </a:p>
+        </p:txBody>
+      </p:sp>
+      <p:sp>
+        <p:nvSpPr>
+          <p:cNvPr id="47" name="Text 45"/>
+          <p:cNvSpPr txBox="1"/>
+          <p:nvPr/>
+        </p:nvSpPr>
+        <p:spPr>
+          <a:xfrm>
+            <a:off x="822960" y="5468112"/>
+            <a:ext cx="3200400" cy="219456"/>
+          </a:xfrm>
+          <a:prstGeom prst="rect">
+            <a:avLst/>
+          </a:prstGeom>
+          <a:noFill/>
+          <a:ln/>
+        </p:spPr>
+        <p:txBody>
+          <a:bodyPr wrap="square" lIns="0" tIns="0" rIns="0" bIns="0" rtlCol="0" anchor="ctr"/>
+          <a:lstStyle/>
+          <a:p>
+            <a:pPr indent="0" marL="0">
+              <a:buNone/>
+            </a:pPr>
+            <a:r>
+              <a:rPr lang="en-US" sz="1000" b="1" dirty="0">
+                <a:solidFill>
+                  <a:srgbClr val="16161A"/>
+                </a:solidFill>
+                <a:latin typeface="Calibri" pitchFamily="34" charset="0"/>
+                <a:ea typeface="Calibri" pitchFamily="34" charset="-122"/>
+                <a:cs typeface="Calibri" pitchFamily="34" charset="-120"/>
+              </a:rPr>
+              <a:t>Plan tahmini</a:t>
+            </a:r>
+            <a:endParaRPr lang="en-US" sz="1000" dirty="0"/>
+          </a:p>
+        </p:txBody>
+      </p:sp>
+      <p:sp>
+        <p:nvSpPr>
+          <p:cNvPr id="48" name="Text 46"/>
+          <p:cNvSpPr txBox="1"/>
+          <p:nvPr/>
+        </p:nvSpPr>
+        <p:spPr>
+          <a:xfrm>
+            <a:off x="822960" y="5687568"/>
+            <a:ext cx="3246120" cy="502920"/>
+          </a:xfrm>
+          <a:prstGeom prst="rect">
+            <a:avLst/>
+          </a:prstGeom>
+          <a:noFill/>
+          <a:ln/>
+        </p:spPr>
+        <p:txBody>
+          <a:bodyPr wrap="square" lIns="0" tIns="0" rIns="0" bIns="0" rtlCol="0" anchor="ctr"/>
+          <a:lstStyle/>
+          <a:p>
+            <a:pPr indent="0" marL="0">
+              <a:lnSpc>
+                <a:spcPts val="1150"/>
+              </a:lnSpc>
+              <a:buNone/>
+            </a:pPr>
+            <a:r>
+              <a:rPr lang="en-US" sz="900" dirty="0">
+                <a:solidFill>
+                  <a:srgbClr val="7A7A82"/>
+                </a:solidFill>
+                <a:latin typeface="Calibri" pitchFamily="34" charset="0"/>
+                <a:ea typeface="Calibri" pitchFamily="34" charset="-122"/>
+                <a:cs typeface="Calibri" pitchFamily="34" charset="-120"/>
+              </a:rPr>
+              <a:t>Dört eskizden hangisini seçtiniz ya da nasıl birleştirdiniz — ve neden.</a:t>
+            </a:r>
+            <a:endParaRPr lang="en-US" sz="900" dirty="0"/>
+          </a:p>
+        </p:txBody>
+      </p:sp>
+      <p:sp>
+        <p:nvSpPr>
+          <p:cNvPr id="49" name="Text 47"/>
+          <p:cNvSpPr txBox="1"/>
+          <p:nvPr/>
+        </p:nvSpPr>
+        <p:spPr>
+          <a:xfrm>
+            <a:off x="4315968" y="5468112"/>
+            <a:ext cx="228600" cy="219456"/>
+          </a:xfrm>
+          <a:prstGeom prst="rect">
+            <a:avLst/>
+          </a:prstGeom>
+          <a:noFill/>
+          <a:ln/>
+        </p:spPr>
+        <p:txBody>
+          <a:bodyPr wrap="square" lIns="0" tIns="0" rIns="0" bIns="0" rtlCol="0" anchor="ctr"/>
+          <a:lstStyle/>
+          <a:p>
+            <a:pPr indent="0" marL="0">
+              <a:buNone/>
+            </a:pPr>
+            <a:r>
+              <a:rPr lang="en-US" sz="1200" b="1" dirty="0">
+                <a:solidFill>
+                  <a:srgbClr val="8C3A2B"/>
+                </a:solidFill>
+                <a:latin typeface="Cambria" pitchFamily="34" charset="0"/>
+                <a:ea typeface="Cambria" pitchFamily="34" charset="-122"/>
+                <a:cs typeface="Cambria" pitchFamily="34" charset="-120"/>
+              </a:rPr>
+              <a:t>2</a:t>
+            </a:r>
+            <a:endParaRPr lang="en-US" sz="1200" dirty="0"/>
+          </a:p>
+        </p:txBody>
+      </p:sp>
+      <p:sp>
+        <p:nvSpPr>
+          <p:cNvPr id="50" name="Text 48"/>
+          <p:cNvSpPr txBox="1"/>
+          <p:nvPr/>
+        </p:nvSpPr>
+        <p:spPr>
+          <a:xfrm>
+            <a:off x="4590288" y="5468112"/>
+            <a:ext cx="3200400" cy="219456"/>
+          </a:xfrm>
+          <a:prstGeom prst="rect">
+            <a:avLst/>
+          </a:prstGeom>
+          <a:noFill/>
+          <a:ln/>
+        </p:spPr>
+        <p:txBody>
+          <a:bodyPr wrap="square" lIns="0" tIns="0" rIns="0" bIns="0" rtlCol="0" anchor="ctr"/>
+          <a:lstStyle/>
+          <a:p>
+            <a:pPr indent="0" marL="0">
+              <a:buNone/>
+            </a:pPr>
+            <a:r>
+              <a:rPr lang="en-US" sz="1000" b="1" dirty="0">
+                <a:solidFill>
+                  <a:srgbClr val="16161A"/>
+                </a:solidFill>
+                <a:latin typeface="Calibri" pitchFamily="34" charset="0"/>
+                <a:ea typeface="Calibri" pitchFamily="34" charset="-122"/>
+                <a:cs typeface="Calibri" pitchFamily="34" charset="-120"/>
+              </a:rPr>
+              <a:t>Üç kelime</a:t>
+            </a:r>
+            <a:endParaRPr lang="en-US" sz="1000" dirty="0"/>
+          </a:p>
+        </p:txBody>
+      </p:sp>
+      <p:sp>
+        <p:nvSpPr>
+          <p:cNvPr id="51" name="Text 49"/>
+          <p:cNvSpPr txBox="1"/>
+          <p:nvPr/>
+        </p:nvSpPr>
+        <p:spPr>
+          <a:xfrm>
+            <a:off x="4590288" y="5687568"/>
+            <a:ext cx="3246120" cy="502920"/>
+          </a:xfrm>
+          <a:prstGeom prst="rect">
+            <a:avLst/>
+          </a:prstGeom>
+          <a:noFill/>
+          <a:ln/>
+        </p:spPr>
+        <p:txBody>
+          <a:bodyPr wrap="square" lIns="0" tIns="0" rIns="0" bIns="0" rtlCol="0" anchor="ctr"/>
+          <a:lstStyle/>
+          <a:p>
+            <a:pPr indent="0" marL="0">
+              <a:lnSpc>
+                <a:spcPts val="1150"/>
+              </a:lnSpc>
+              <a:buNone/>
+            </a:pPr>
+            <a:r>
+              <a:rPr lang="en-US" sz="900" dirty="0">
+                <a:solidFill>
+                  <a:srgbClr val="7A7A82"/>
+                </a:solidFill>
+                <a:latin typeface="Calibri" pitchFamily="34" charset="0"/>
+                <a:ea typeface="Calibri" pitchFamily="34" charset="-122"/>
+                <a:cs typeface="Calibri" pitchFamily="34" charset="-120"/>
+              </a:rPr>
+              <a:t>Her kelimenin görseldeki kanıtı. Elenen kelimelerden birini de söyleyin, neden elendi.</a:t>
+            </a:r>
+            <a:endParaRPr lang="en-US" sz="900" dirty="0"/>
+          </a:p>
+        </p:txBody>
+      </p:sp>
+      <p:sp>
+        <p:nvSpPr>
+          <p:cNvPr id="52" name="Text 50"/>
+          <p:cNvSpPr txBox="1"/>
+          <p:nvPr/>
+        </p:nvSpPr>
+        <p:spPr>
+          <a:xfrm>
+            <a:off x="8083296" y="5468112"/>
+            <a:ext cx="228600" cy="219456"/>
+          </a:xfrm>
+          <a:prstGeom prst="rect">
+            <a:avLst/>
+          </a:prstGeom>
+          <a:noFill/>
+          <a:ln/>
+        </p:spPr>
+        <p:txBody>
+          <a:bodyPr wrap="square" lIns="0" tIns="0" rIns="0" bIns="0" rtlCol="0" anchor="ctr"/>
+          <a:lstStyle/>
+          <a:p>
+            <a:pPr indent="0" marL="0">
+              <a:buNone/>
+            </a:pPr>
+            <a:r>
+              <a:rPr lang="en-US" sz="1200" b="1" dirty="0">
+                <a:solidFill>
+                  <a:srgbClr val="8C3A2B"/>
+                </a:solidFill>
+                <a:latin typeface="Cambria" pitchFamily="34" charset="0"/>
+                <a:ea typeface="Cambria" pitchFamily="34" charset="-122"/>
+                <a:cs typeface="Cambria" pitchFamily="34" charset="-120"/>
+              </a:rPr>
+              <a:t>3</a:t>
+            </a:r>
+            <a:endParaRPr lang="en-US" sz="1200" dirty="0"/>
+          </a:p>
+        </p:txBody>
+      </p:sp>
+      <p:sp>
+        <p:nvSpPr>
+          <p:cNvPr id="53" name="Text 51"/>
+          <p:cNvSpPr txBox="1"/>
+          <p:nvPr/>
+        </p:nvSpPr>
+        <p:spPr>
+          <a:xfrm>
+            <a:off x="8357616" y="5468112"/>
+            <a:ext cx="3200400" cy="219456"/>
+          </a:xfrm>
+          <a:prstGeom prst="rect">
+            <a:avLst/>
+          </a:prstGeom>
+          <a:noFill/>
+          <a:ln/>
+        </p:spPr>
+        <p:txBody>
+          <a:bodyPr wrap="square" lIns="0" tIns="0" rIns="0" bIns="0" rtlCol="0" anchor="ctr"/>
+          <a:lstStyle/>
+          <a:p>
+            <a:pPr indent="0" marL="0">
+              <a:buNone/>
+            </a:pPr>
+            <a:r>
+              <a:rPr lang="en-US" sz="1000" b="1" dirty="0">
+                <a:solidFill>
+                  <a:srgbClr val="16161A"/>
+                </a:solidFill>
+                <a:latin typeface="Calibri" pitchFamily="34" charset="0"/>
+                <a:ea typeface="Calibri" pitchFamily="34" charset="-122"/>
+                <a:cs typeface="Calibri" pitchFamily="34" charset="-120"/>
+              </a:rPr>
+              <a:t>Tek müdahale</a:t>
+            </a:r>
+            <a:endParaRPr lang="en-US" sz="1000" dirty="0"/>
+          </a:p>
+        </p:txBody>
+      </p:sp>
+      <p:sp>
+        <p:nvSpPr>
+          <p:cNvPr id="54" name="Text 52"/>
+          <p:cNvSpPr txBox="1"/>
+          <p:nvPr/>
+        </p:nvSpPr>
+        <p:spPr>
+          <a:xfrm>
+            <a:off x="8357616" y="5687568"/>
+            <a:ext cx="3246120" cy="502920"/>
+          </a:xfrm>
+          <a:prstGeom prst="rect">
+            <a:avLst/>
+          </a:prstGeom>
+          <a:noFill/>
+          <a:ln/>
+        </p:spPr>
+        <p:txBody>
+          <a:bodyPr wrap="square" lIns="0" tIns="0" rIns="0" bIns="0" rtlCol="0" anchor="ctr"/>
+          <a:lstStyle/>
+          <a:p>
+            <a:pPr indent="0" marL="0">
+              <a:lnSpc>
+                <a:spcPts val="1150"/>
+              </a:lnSpc>
+              <a:buNone/>
+            </a:pPr>
+            <a:r>
+              <a:rPr lang="en-US" sz="900" dirty="0">
+                <a:solidFill>
+                  <a:srgbClr val="7A7A82"/>
+                </a:solidFill>
+                <a:latin typeface="Calibri" pitchFamily="34" charset="0"/>
+                <a:ea typeface="Calibri" pitchFamily="34" charset="-122"/>
+                <a:cs typeface="Calibri" pitchFamily="34" charset="-120"/>
+              </a:rPr>
+              <a:t>Ne değiştirdiniz, hangi kelimeyi güçlendirmek için.</a:t>
+            </a:r>
+            <a:endParaRPr lang="en-US" sz="900" dirty="0"/>
+          </a:p>
+        </p:txBody>
+      </p:sp>
+      <p:sp>
+        <p:nvSpPr>
+          <p:cNvPr id="55" name="Text 53"/>
+          <p:cNvSpPr txBox="1"/>
+          <p:nvPr/>
+        </p:nvSpPr>
+        <p:spPr>
+          <a:xfrm>
+            <a:off x="548640" y="6345936"/>
+            <a:ext cx="11091672" cy="237744"/>
+          </a:xfrm>
+          <a:prstGeom prst="rect">
+            <a:avLst/>
+          </a:prstGeom>
+          <a:noFill/>
+          <a:ln/>
+        </p:spPr>
+        <p:txBody>
+          <a:bodyPr wrap="square" lIns="0" tIns="0" rIns="0" bIns="0" rtlCol="0" anchor="ctr"/>
+          <a:lstStyle/>
+          <a:p>
+            <a:pPr indent="0" marL="0">
+              <a:buNone/>
+            </a:pPr>
+            <a:r>
+              <a:rPr lang="en-US" sz="1150" i="1" dirty="0">
+                <a:solidFill>
+                  <a:srgbClr val="8C3A2B"/>
+                </a:solidFill>
+                <a:latin typeface="Cambria" pitchFamily="34" charset="0"/>
+                <a:ea typeface="Cambria" pitchFamily="34" charset="-122"/>
+                <a:cs typeface="Cambria" pitchFamily="34" charset="-120"/>
+              </a:rPr>
+              <a:t>Uzlaşmak zorunda değilsiniz. Ayrıştığınız bir konuyu sunumda açıkça söyleyin — “biz burada anlaşamadık, çünkü…”</a:t>
+            </a:r>
+            <a:endParaRPr lang="en-US" sz="1150" dirty="0"/>
+          </a:p>
+        </p:txBody>
+      </p:sp>
+    </p:spTree>
+  </p:cSld>
+  <p:clrMapOvr>
+    <a:masterClrMapping/>
+  </p:clrMapOvr>
+</p:sld>
+</file>
+
+<file path=ppt/slides/slide3.xml><?xml version="1.0" encoding="utf-8"?>
+<p:sld xmlns:a="http://schemas.openxmlformats.org/drawingml/2006/main" xmlns:r="http://schemas.openxmlformats.org/officeDocument/2006/relationships" xmlns:p="http://schemas.openxmlformats.org/presentationml/2006/main">
+  <p:cSld name="Slide 3">
+    <p:bg>
+      <p:bgPr>
+        <a:solidFill>
+          <a:srgbClr val="FCFCFA"/>
+        </a:solidFill>
+      </p:bgPr>
+    </p:bg>
+    <p:spTree>
+      <p:nvGrpSpPr>
+        <p:cNvPr id="1" name=""/>
+        <p:cNvGrpSpPr/>
+        <p:nvPr/>
+      </p:nvGrpSpPr>
+      <p:grpSpPr>
+        <a:xfrm>
+          <a:off x="0" y="0"/>
+          <a:ext cx="0" cy="0"/>
+          <a:chOff x="0" y="0"/>
+          <a:chExt cx="0" cy="0"/>
+        </a:xfrm>
+      </p:grpSpPr>
+      <p:sp>
+        <p:nvSpPr>
+          <p:cNvPr id="2" name="Text 0"/>
+          <p:cNvSpPr txBox="1"/>
+          <p:nvPr/>
+        </p:nvSpPr>
+        <p:spPr>
+          <a:xfrm>
+            <a:off x="548640" y="292608"/>
+            <a:ext cx="7315200" cy="457200"/>
+          </a:xfrm>
+          <a:prstGeom prst="rect">
+            <a:avLst/>
+          </a:prstGeom>
+          <a:noFill/>
+          <a:ln/>
+        </p:spPr>
+        <p:txBody>
+          <a:bodyPr wrap="square" lIns="0" tIns="0" rIns="0" bIns="0" rtlCol="0" anchor="ctr"/>
+          <a:lstStyle/>
+          <a:p>
+            <a:pPr indent="0" marL="0">
+              <a:buNone/>
+            </a:pPr>
+            <a:r>
+              <a:rPr lang="en-US" sz="2400" b="1" dirty="0">
+                <a:solidFill>
+                  <a:srgbClr val="16161A"/>
+                </a:solidFill>
+                <a:latin typeface="Cambria" pitchFamily="34" charset="0"/>
+                <a:ea typeface="Cambria" pitchFamily="34" charset="-122"/>
+                <a:cs typeface="Cambria" pitchFamily="34" charset="-120"/>
+              </a:rPr>
+              <a:t>Egzersizi yönetme notu</a:t>
+            </a:r>
+            <a:endParaRPr lang="en-US" sz="2400" dirty="0"/>
+          </a:p>
+        </p:txBody>
+      </p:sp>
+      <p:sp>
+        <p:nvSpPr>
+          <p:cNvPr id="3" name="Text 1"/>
+          <p:cNvSpPr txBox="1"/>
+          <p:nvPr/>
+        </p:nvSpPr>
+        <p:spPr>
+          <a:xfrm>
+            <a:off x="548640" y="749808"/>
+            <a:ext cx="8229600" cy="256032"/>
+          </a:xfrm>
+          <a:prstGeom prst="rect">
+            <a:avLst/>
+          </a:prstGeom>
+          <a:noFill/>
+          <a:ln/>
+        </p:spPr>
+        <p:txBody>
+          <a:bodyPr wrap="square" lIns="0" tIns="0" rIns="0" bIns="0" rtlCol="0" anchor="ctr"/>
+          <a:lstStyle/>
+          <a:p>
+            <a:pPr indent="0" marL="0">
+              <a:buNone/>
+            </a:pPr>
+            <a:r>
+              <a:rPr lang="en-US" sz="1050" dirty="0">
+                <a:solidFill>
+                  <a:srgbClr val="7A7A82"/>
+                </a:solidFill>
+                <a:latin typeface="Calibri" pitchFamily="34" charset="0"/>
+                <a:ea typeface="Calibri" pitchFamily="34" charset="-122"/>
+                <a:cs typeface="Calibri" pitchFamily="34" charset="-120"/>
+              </a:rPr>
+              <a:t>Mağaza okuma  ·  bireysel 35 dk + grup 45 dk + sunum 25 dk  =  ~105 dakika</a:t>
+            </a:r>
+            <a:endParaRPr lang="en-US" sz="1050" dirty="0"/>
+          </a:p>
+        </p:txBody>
+      </p:sp>
+      <p:sp>
+        <p:nvSpPr>
+          <p:cNvPr id="4" name="Text 2"/>
+          <p:cNvSpPr txBox="1"/>
+          <p:nvPr/>
+        </p:nvSpPr>
+        <p:spPr>
+          <a:xfrm>
+            <a:off x="548640" y="1207008"/>
+            <a:ext cx="5120640" cy="237744"/>
+          </a:xfrm>
+          <a:prstGeom prst="rect">
+            <a:avLst/>
+          </a:prstGeom>
+          <a:noFill/>
+          <a:ln/>
+        </p:spPr>
+        <p:txBody>
+          <a:bodyPr wrap="square" lIns="0" tIns="0" rIns="0" bIns="0" rtlCol="0" anchor="ctr"/>
+          <a:lstStyle/>
+          <a:p>
+            <a:pPr indent="0" marL="0">
+              <a:buNone/>
+            </a:pPr>
+            <a:r>
+              <a:rPr lang="en-US" sz="900" b="1" spc="160" kern="0" dirty="0">
+                <a:solidFill>
+                  <a:srgbClr val="8C3A2B"/>
+                </a:solidFill>
+                <a:latin typeface="Calibri" pitchFamily="34" charset="0"/>
+                <a:ea typeface="Calibri" pitchFamily="34" charset="-122"/>
+                <a:cs typeface="Calibri" pitchFamily="34" charset="-120"/>
+              </a:rPr>
+              <a:t>GÖRSEL SEÇİM KRİTERLERİ</a:t>
+            </a:r>
+            <a:endParaRPr lang="en-US" sz="900" dirty="0"/>
+          </a:p>
+        </p:txBody>
+      </p:sp>
+      <p:sp>
+        <p:nvSpPr>
+          <p:cNvPr id="5" name="Shape 3"/>
+          <p:cNvSpPr/>
+          <p:nvPr/>
+        </p:nvSpPr>
+        <p:spPr>
+          <a:xfrm>
+            <a:off x="612648" y="1508760"/>
             <a:ext cx="91440" cy="91440"/>
           </a:xfrm>
           <a:prstGeom prst="ellipse">
@@ -3249,8 +5152,8 @@
         </p:nvSpPr>
         <p:spPr>
           <a:xfrm>
-            <a:off x="868680" y="1463040"/>
-            <a:ext cx="4846320" cy="457200"/>
+            <a:off x="868680" y="1426464"/>
+            <a:ext cx="4846320" cy="512064"/>
           </a:xfrm>
           <a:prstGeom prst="rect">
             <a:avLst/>
@@ -3291,7 +5194,7 @@
         </p:nvSpPr>
         <p:spPr>
           <a:xfrm>
-            <a:off x="612648" y="2057400"/>
+            <a:off x="612648" y="2039112"/>
             <a:ext cx="91440" cy="91440"/>
           </a:xfrm>
           <a:prstGeom prst="ellipse">
@@ -3316,8 +5219,8 @@
         </p:nvSpPr>
         <p:spPr>
           <a:xfrm>
-            <a:off x="868680" y="1975104"/>
-            <a:ext cx="4846320" cy="457200"/>
+            <a:off x="868680" y="1956816"/>
+            <a:ext cx="4846320" cy="512064"/>
           </a:xfrm>
           <a:prstGeom prst="rect">
             <a:avLst/>
@@ -3384,7 +5287,7 @@
         <p:spPr>
           <a:xfrm>
             <a:off x="868680" y="2487168"/>
-            <a:ext cx="4846320" cy="457200"/>
+            <a:ext cx="4846320" cy="512064"/>
           </a:xfrm>
           <a:prstGeom prst="rect">
             <a:avLst/>
@@ -3411,7 +5314,7 @@
                 <a:ea typeface="Calibri" pitchFamily="34" charset="-122"/>
                 <a:cs typeface="Calibri" pitchFamily="34" charset="-120"/>
               </a:rPr>
-              <a:t>Logoyu ve tabelayı kırpın. Marka adı görünmesin — mekânı okumak zorunda kalsınlar.</a:t>
+              <a:t>Logoyu ve tabelayı kırpın. Marka adı görünmesin.</a:t>
             </a:r>
             <a:endParaRPr lang="en-US" sz="1050" dirty="0"/>
           </a:p>
@@ -3425,7 +5328,7 @@
         </p:nvSpPr>
         <p:spPr>
           <a:xfrm>
-            <a:off x="612648" y="3081528"/>
+            <a:off x="612648" y="3099816"/>
             <a:ext cx="91440" cy="91440"/>
           </a:xfrm>
           <a:prstGeom prst="ellipse">
@@ -3450,8 +5353,8 @@
         </p:nvSpPr>
         <p:spPr>
           <a:xfrm>
-            <a:off x="868680" y="2999232"/>
-            <a:ext cx="4846320" cy="457200"/>
+            <a:off x="868680" y="3017520"/>
+            <a:ext cx="4846320" cy="512064"/>
           </a:xfrm>
           <a:prstGeom prst="rect">
             <a:avLst/>
@@ -3492,7 +5395,7 @@
         </p:nvSpPr>
         <p:spPr>
           <a:xfrm>
-            <a:off x="612648" y="3593592"/>
+            <a:off x="612648" y="3630168"/>
             <a:ext cx="91440" cy="91440"/>
           </a:xfrm>
           <a:prstGeom prst="ellipse">
@@ -3517,8 +5420,8 @@
         </p:nvSpPr>
         <p:spPr>
           <a:xfrm>
-            <a:off x="868680" y="3511296"/>
-            <a:ext cx="4846320" cy="457200"/>
+            <a:off x="868680" y="3547872"/>
+            <a:ext cx="4846320" cy="512064"/>
           </a:xfrm>
           <a:prstGeom prst="rect">
             <a:avLst/>
@@ -3545,7 +5448,7 @@
                 <a:ea typeface="Calibri" pitchFamily="34" charset="-122"/>
                 <a:cs typeface="Calibri" pitchFamily="34" charset="-120"/>
               </a:rPr>
-              <a:t>Görseli numaralandırın (1–4) ve kâğıdın üstüne numarayı yazdırın.</a:t>
+              <a:t>Görselleri 1–4 numaralandırın; dağıtımı siz yapın, seçtirmeyin.</a:t>
             </a:r>
             <a:endParaRPr lang="en-US" sz="1050" dirty="0"/>
           </a:p>
@@ -3559,7 +5462,7 @@
         </p:nvSpPr>
         <p:spPr>
           <a:xfrm>
-            <a:off x="6309360" y="1234440"/>
+            <a:off x="6309360" y="1207008"/>
             <a:ext cx="5303520" cy="237744"/>
           </a:xfrm>
           <a:prstGeom prst="rect">
@@ -3598,7 +5501,7 @@
         </p:nvSpPr>
         <p:spPr>
           <a:xfrm>
-            <a:off x="6309360" y="1499616"/>
+            <a:off x="6309360" y="1463040"/>
             <a:ext cx="685800" cy="274320"/>
           </a:xfrm>
           <a:prstGeom prst="rect">
@@ -3637,8 +5540,8 @@
         </p:nvSpPr>
         <p:spPr>
           <a:xfrm>
-            <a:off x="7086600" y="1463040"/>
-            <a:ext cx="4553712" cy="457200"/>
+            <a:off x="7086600" y="1426464"/>
+            <a:ext cx="4553712" cy="512064"/>
           </a:xfrm>
           <a:prstGeom prst="rect">
             <a:avLst/>
@@ -3665,7 +5568,7 @@
                 <a:ea typeface="Calibri" pitchFamily="34" charset="-122"/>
                 <a:cs typeface="Calibri" pitchFamily="34" charset="-120"/>
               </a:rPr>
-              <a:t>Yönerge + birlikte bir örnek. Beşinci bir görseli ekrana yansıtıp iki kutuyu sınıfla doldurun.</a:t>
+              <a:t>Yönerge. Beşinci bir görseli ekrana yansıtıp iki kutuyu sınıfla birlikte doldurun.</a:t>
             </a:r>
             <a:endParaRPr lang="en-US" sz="1050" dirty="0"/>
           </a:p>
@@ -3679,7 +5582,7 @@
         </p:nvSpPr>
         <p:spPr>
           <a:xfrm>
-            <a:off x="6309360" y="2011680"/>
+            <a:off x="6309360" y="1993392"/>
             <a:ext cx="685800" cy="274320"/>
           </a:xfrm>
           <a:prstGeom prst="rect">
@@ -3718,8 +5621,8 @@
         </p:nvSpPr>
         <p:spPr>
           <a:xfrm>
-            <a:off x="7086600" y="1975104"/>
-            <a:ext cx="4553712" cy="457200"/>
+            <a:off x="7086600" y="1956816"/>
+            <a:ext cx="4553712" cy="512064"/>
           </a:xfrm>
           <a:prstGeom prst="rect">
             <a:avLst/>
@@ -3746,7 +5649,7 @@
                 <a:ea typeface="Calibri" pitchFamily="34" charset="-122"/>
                 <a:cs typeface="Calibri" pitchFamily="34" charset="-120"/>
               </a:rPr>
-              <a:t>Bireysel ve sessiz çalışma. Konuşma yok, telefon yok, arama yok.</a:t>
+              <a:t>Bireysel ve sessiz. Konuşma yok, telefon yok, arama yok.</a:t>
             </a:r>
             <a:endParaRPr lang="en-US" sz="1050" dirty="0"/>
           </a:p>
@@ -3785,7 +5688,7 @@
                 <a:ea typeface="Calibri" pitchFamily="34" charset="-122"/>
                 <a:cs typeface="Calibri" pitchFamily="34" charset="-120"/>
               </a:rPr>
-              <a:t>10 dk</a:t>
+              <a:t>45 dk</a:t>
             </a:r>
             <a:endParaRPr lang="en-US" sz="1000" dirty="0"/>
           </a:p>
@@ -3800,7 +5703,7 @@
         <p:spPr>
           <a:xfrm>
             <a:off x="7086600" y="2487168"/>
-            <a:ext cx="4553712" cy="457200"/>
+            <a:ext cx="4553712" cy="512064"/>
           </a:xfrm>
           <a:prstGeom prst="rect">
             <a:avLst/>
@@ -3827,7 +5730,7 @@
                 <a:ea typeface="Calibri" pitchFamily="34" charset="-122"/>
                 <a:cs typeface="Calibri" pitchFamily="34" charset="-120"/>
               </a:rPr>
-              <a:t>Aynı görseli alanlar dörtlü gruplaşır ve karşılaştırır. Anlaşamadıkları yer asıl konudur.</a:t>
+              <a:t>Grup çalışması: ayrışma haritası, on iki kelimeden üçe, tek müdahale.</a:t>
             </a:r>
             <a:endParaRPr lang="en-US" sz="1050" dirty="0"/>
           </a:p>
@@ -3841,7 +5744,7 @@
         </p:nvSpPr>
         <p:spPr>
           <a:xfrm>
-            <a:off x="6309360" y="3035808"/>
+            <a:off x="6309360" y="3054096"/>
             <a:ext cx="685800" cy="274320"/>
           </a:xfrm>
           <a:prstGeom prst="rect">
@@ -3880,8 +5783,8 @@
         </p:nvSpPr>
         <p:spPr>
           <a:xfrm>
-            <a:off x="7086600" y="2999232"/>
-            <a:ext cx="4553712" cy="457200"/>
+            <a:off x="7086600" y="3017520"/>
+            <a:ext cx="4553712" cy="512064"/>
           </a:xfrm>
           <a:prstGeom prst="rect">
             <a:avLst/>
@@ -3908,7 +5811,7 @@
                 <a:ea typeface="Calibri" pitchFamily="34" charset="-122"/>
                 <a:cs typeface="Calibri" pitchFamily="34" charset="-120"/>
               </a:rPr>
-              <a:t>Dört grup sırayla görselini sınıfa anlatır — beşer dakika.</a:t>
+              <a:t>Dört grup sırayla anlatır — beşer dakika.</a:t>
             </a:r>
             <a:endParaRPr lang="en-US" sz="1050" dirty="0"/>
           </a:p>
@@ -3922,7 +5825,7 @@
         </p:nvSpPr>
         <p:spPr>
           <a:xfrm>
-            <a:off x="6309360" y="3547872"/>
+            <a:off x="6309360" y="3584448"/>
             <a:ext cx="685800" cy="274320"/>
           </a:xfrm>
           <a:prstGeom prst="rect">
@@ -3947,7 +5850,7 @@
                 <a:ea typeface="Calibri" pitchFamily="34" charset="-122"/>
                 <a:cs typeface="Calibri" pitchFamily="34" charset="-120"/>
               </a:rPr>
-              <a:t>10 dk</a:t>
+              <a:t>5 dk</a:t>
             </a:r>
             <a:endParaRPr lang="en-US" sz="1000" dirty="0"/>
           </a:p>
@@ -3961,8 +5864,8 @@
         </p:nvSpPr>
         <p:spPr>
           <a:xfrm>
-            <a:off x="7086600" y="3511296"/>
-            <a:ext cx="4553712" cy="457200"/>
+            <a:off x="7086600" y="3547872"/>
+            <a:ext cx="4553712" cy="512064"/>
           </a:xfrm>
           <a:prstGeom prst="rect">
             <a:avLst/>
@@ -4026,7 +5929,7 @@
         </p:nvSpPr>
         <p:spPr>
           <a:xfrm>
-            <a:off x="548640" y="4370832"/>
+            <a:off x="548640" y="4352544"/>
             <a:ext cx="5120640" cy="237744"/>
           </a:xfrm>
           <a:prstGeom prst="rect">
@@ -4051,7 +5954,7 @@
                 <a:ea typeface="Calibri" pitchFamily="34" charset="-122"/>
                 <a:cs typeface="Calibri" pitchFamily="34" charset="-120"/>
               </a:rPr>
-              <a:t>ÖRNEK DOLDURULMUŞ SATIR</a:t>
+              <a:t>GRUP AŞAMASINDA DİKKAT</a:t>
             </a:r>
             <a:endParaRPr lang="en-US" sz="900" dirty="0"/>
           </a:p>
@@ -4066,23 +5969,65 @@
         <p:spPr>
           <a:xfrm>
             <a:off x="548640" y="4626864"/>
-            <a:ext cx="5120640" cy="256032"/>
-          </a:xfrm>
-          <a:prstGeom prst="rect">
-            <a:avLst/>
-          </a:prstGeom>
-          <a:noFill/>
-          <a:ln/>
-        </p:spPr>
-        <p:txBody>
-          <a:bodyPr wrap="square" lIns="0" tIns="0" rIns="0" bIns="0" rtlCol="0" anchor="ctr"/>
-          <a:lstStyle/>
-          <a:p>
-            <a:pPr indent="0" marL="0">
-              <a:buNone/>
-            </a:pPr>
-            <a:r>
-              <a:rPr lang="en-US" sz="1050" i="1" dirty="0">
+            <a:ext cx="5330952" cy="219456"/>
+          </a:xfrm>
+          <a:prstGeom prst="rect">
+            <a:avLst/>
+          </a:prstGeom>
+          <a:noFill/>
+          <a:ln/>
+        </p:spPr>
+        <p:txBody>
+          <a:bodyPr wrap="square" lIns="0" tIns="0" rIns="0" bIns="0" rtlCol="0" anchor="ctr"/>
+          <a:lstStyle/>
+          <a:p>
+            <a:pPr indent="0" marL="0">
+              <a:buNone/>
+            </a:pPr>
+            <a:r>
+              <a:rPr lang="en-US" sz="1050" b="1" dirty="0">
+                <a:solidFill>
+                  <a:srgbClr val="16161A"/>
+                </a:solidFill>
+                <a:latin typeface="Calibri" pitchFamily="34" charset="0"/>
+                <a:ea typeface="Calibri" pitchFamily="34" charset="-122"/>
+                <a:cs typeface="Calibri" pitchFamily="34" charset="-120"/>
+              </a:rPr>
+              <a:t>Uzlaşmaya zorlamayın.</a:t>
+            </a:r>
+            <a:endParaRPr lang="en-US" sz="1050" dirty="0"/>
+          </a:p>
+        </p:txBody>
+      </p:sp>
+      <p:sp>
+        <p:nvSpPr>
+          <p:cNvPr id="29" name="Text 27"/>
+          <p:cNvSpPr txBox="1"/>
+          <p:nvPr/>
+        </p:nvSpPr>
+        <p:spPr>
+          <a:xfrm>
+            <a:off x="548640" y="4846320"/>
+            <a:ext cx="5330952" cy="475488"/>
+          </a:xfrm>
+          <a:prstGeom prst="rect">
+            <a:avLst/>
+          </a:prstGeom>
+          <a:noFill/>
+          <a:ln/>
+        </p:spPr>
+        <p:txBody>
+          <a:bodyPr wrap="square" lIns="0" tIns="0" rIns="0" bIns="0" rtlCol="0" anchor="ctr"/>
+          <a:lstStyle/>
+          <a:p>
+            <a:pPr indent="0" marL="0">
+              <a:lnSpc>
+                <a:spcPts val="1250"/>
+              </a:lnSpc>
+              <a:buNone/>
+            </a:pPr>
+            <a:r>
+              <a:rPr lang="en-US" sz="1000" dirty="0">
                 <a:solidFill>
                   <a:srgbClr val="7A7A82"/>
                 </a:solidFill>
@@ -4090,7 +6035,46 @@
                 <a:ea typeface="Calibri" pitchFamily="34" charset="-122"/>
                 <a:cs typeface="Calibri" pitchFamily="34" charset="-120"/>
               </a:rPr>
-              <a:t>Bir seramik atölyesi görseli için:</a:t>
+              <a:t>Dört okumayı ortalayan grup en değerli şeyi kaybeder. Ayrışmayı yazmaları yeter; çözmeleri gerekmiyor.</a:t>
+            </a:r>
+            <a:endParaRPr lang="en-US" sz="1000" dirty="0"/>
+          </a:p>
+        </p:txBody>
+      </p:sp>
+      <p:sp>
+        <p:nvSpPr>
+          <p:cNvPr id="30" name="Text 28"/>
+          <p:cNvSpPr txBox="1"/>
+          <p:nvPr/>
+        </p:nvSpPr>
+        <p:spPr>
+          <a:xfrm>
+            <a:off x="6309360" y="4626864"/>
+            <a:ext cx="5330952" cy="219456"/>
+          </a:xfrm>
+          <a:prstGeom prst="rect">
+            <a:avLst/>
+          </a:prstGeom>
+          <a:noFill/>
+          <a:ln/>
+        </p:spPr>
+        <p:txBody>
+          <a:bodyPr wrap="square" lIns="0" tIns="0" rIns="0" bIns="0" rtlCol="0" anchor="ctr"/>
+          <a:lstStyle/>
+          <a:p>
+            <a:pPr indent="0" marL="0">
+              <a:buNone/>
+            </a:pPr>
+            <a:r>
+              <a:rPr lang="en-US" sz="1050" b="1" dirty="0">
+                <a:solidFill>
+                  <a:srgbClr val="16161A"/>
+                </a:solidFill>
+                <a:latin typeface="Calibri" pitchFamily="34" charset="0"/>
+                <a:ea typeface="Calibri" pitchFamily="34" charset="-122"/>
+                <a:cs typeface="Calibri" pitchFamily="34" charset="-120"/>
+              </a:rPr>
+              <a:t>Kalemi en az konuşana verin.</a:t>
             </a:r>
             <a:endParaRPr lang="en-US" sz="1050" dirty="0"/>
           </a:p>
@@ -4098,53 +6082,218 @@
       </p:sp>
       <p:sp>
         <p:nvSpPr>
-          <p:cNvPr id="29" name="Text 27"/>
-          <p:cNvSpPr txBox="1"/>
-          <p:nvPr/>
-        </p:nvSpPr>
-        <p:spPr>
-          <a:xfrm>
-            <a:off x="548640" y="4956048"/>
-            <a:ext cx="1600200" cy="274320"/>
-          </a:xfrm>
-          <a:prstGeom prst="rect">
-            <a:avLst/>
-          </a:prstGeom>
-          <a:noFill/>
-          <a:ln/>
-        </p:spPr>
-        <p:txBody>
-          <a:bodyPr wrap="square" lIns="0" tIns="0" rIns="0" bIns="0" rtlCol="0" anchor="ctr"/>
-          <a:lstStyle/>
-          <a:p>
-            <a:pPr indent="0" marL="0">
-              <a:buNone/>
-            </a:pPr>
-            <a:r>
-              <a:rPr lang="en-US" sz="850" b="1" spc="120" kern="0" dirty="0">
-                <a:solidFill>
-                  <a:srgbClr val="A6A6AC"/>
-                </a:solidFill>
-                <a:latin typeface="Calibri" pitchFamily="34" charset="0"/>
-                <a:ea typeface="Calibri" pitchFamily="34" charset="-122"/>
-                <a:cs typeface="Calibri" pitchFamily="34" charset="-120"/>
-              </a:rPr>
-              <a:t>GÖRDÜĞÜM</a:t>
-            </a:r>
-            <a:endParaRPr lang="en-US" sz="850" dirty="0"/>
-          </a:p>
-        </p:txBody>
-      </p:sp>
-      <p:sp>
-        <p:nvSpPr>
-          <p:cNvPr id="30" name="Text 28"/>
-          <p:cNvSpPr txBox="1"/>
-          <p:nvPr/>
-        </p:nvSpPr>
-        <p:spPr>
-          <a:xfrm>
-            <a:off x="2240280" y="4919472"/>
-            <a:ext cx="9400032" cy="457200"/>
+          <p:cNvPr id="31" name="Text 29"/>
+          <p:cNvSpPr txBox="1"/>
+          <p:nvPr/>
+        </p:nvSpPr>
+        <p:spPr>
+          <a:xfrm>
+            <a:off x="6309360" y="4846320"/>
+            <a:ext cx="5330952" cy="475488"/>
+          </a:xfrm>
+          <a:prstGeom prst="rect">
+            <a:avLst/>
+          </a:prstGeom>
+          <a:noFill/>
+          <a:ln/>
+        </p:spPr>
+        <p:txBody>
+          <a:bodyPr wrap="square" lIns="0" tIns="0" rIns="0" bIns="0" rtlCol="0" anchor="ctr"/>
+          <a:lstStyle/>
+          <a:p>
+            <a:pPr indent="0" marL="0">
+              <a:lnSpc>
+                <a:spcPts val="1250"/>
+              </a:lnSpc>
+              <a:buNone/>
+            </a:pPr>
+            <a:r>
+              <a:rPr lang="en-US" sz="1000" dirty="0">
+                <a:solidFill>
+                  <a:srgbClr val="7A7A82"/>
+                </a:solidFill>
+                <a:latin typeface="Calibri" pitchFamily="34" charset="0"/>
+                <a:ea typeface="Calibri" pitchFamily="34" charset="-122"/>
+                <a:cs typeface="Calibri" pitchFamily="34" charset="-120"/>
+              </a:rPr>
+              <a:t>Yoksa kâğıdı baskın öğrenci doldurur ve diğer üç okuma kaybolur.</a:t>
+            </a:r>
+            <a:endParaRPr lang="en-US" sz="1000" dirty="0"/>
+          </a:p>
+        </p:txBody>
+      </p:sp>
+      <p:sp>
+        <p:nvSpPr>
+          <p:cNvPr id="32" name="Text 30"/>
+          <p:cNvSpPr txBox="1"/>
+          <p:nvPr/>
+        </p:nvSpPr>
+        <p:spPr>
+          <a:xfrm>
+            <a:off x="548640" y="5376672"/>
+            <a:ext cx="5330952" cy="219456"/>
+          </a:xfrm>
+          <a:prstGeom prst="rect">
+            <a:avLst/>
+          </a:prstGeom>
+          <a:noFill/>
+          <a:ln/>
+        </p:spPr>
+        <p:txBody>
+          <a:bodyPr wrap="square" lIns="0" tIns="0" rIns="0" bIns="0" rtlCol="0" anchor="ctr"/>
+          <a:lstStyle/>
+          <a:p>
+            <a:pPr indent="0" marL="0">
+              <a:buNone/>
+            </a:pPr>
+            <a:r>
+              <a:rPr lang="en-US" sz="1050" b="1" dirty="0">
+                <a:solidFill>
+                  <a:srgbClr val="16161A"/>
+                </a:solidFill>
+                <a:latin typeface="Calibri" pitchFamily="34" charset="0"/>
+                <a:ea typeface="Calibri" pitchFamily="34" charset="-122"/>
+                <a:cs typeface="Calibri" pitchFamily="34" charset="-120"/>
+              </a:rPr>
+              <a:t>“Kaliteli” çıkarsa hemen müdahale edin.</a:t>
+            </a:r>
+            <a:endParaRPr lang="en-US" sz="1050" dirty="0"/>
+          </a:p>
+        </p:txBody>
+      </p:sp>
+      <p:sp>
+        <p:nvSpPr>
+          <p:cNvPr id="33" name="Text 31"/>
+          <p:cNvSpPr txBox="1"/>
+          <p:nvPr/>
+        </p:nvSpPr>
+        <p:spPr>
+          <a:xfrm>
+            <a:off x="548640" y="5596128"/>
+            <a:ext cx="5330952" cy="475488"/>
+          </a:xfrm>
+          <a:prstGeom prst="rect">
+            <a:avLst/>
+          </a:prstGeom>
+          <a:noFill/>
+          <a:ln/>
+        </p:spPr>
+        <p:txBody>
+          <a:bodyPr wrap="square" lIns="0" tIns="0" rIns="0" bIns="0" rtlCol="0" anchor="ctr"/>
+          <a:lstStyle/>
+          <a:p>
+            <a:pPr indent="0" marL="0">
+              <a:lnSpc>
+                <a:spcPts val="1250"/>
+              </a:lnSpc>
+              <a:buNone/>
+            </a:pPr>
+            <a:r>
+              <a:rPr lang="en-US" sz="1000" dirty="0">
+                <a:solidFill>
+                  <a:srgbClr val="7A7A82"/>
+                </a:solidFill>
+                <a:latin typeface="Calibri" pitchFamily="34" charset="0"/>
+                <a:ea typeface="Calibri" pitchFamily="34" charset="-122"/>
+                <a:cs typeface="Calibri" pitchFamily="34" charset="-120"/>
+              </a:rPr>
+              <a:t>Havuzda böyle kelimeler olacak; elenme gerekçesini grup sözlü olarak kurmalı.</a:t>
+            </a:r>
+            <a:endParaRPr lang="en-US" sz="1000" dirty="0"/>
+          </a:p>
+        </p:txBody>
+      </p:sp>
+      <p:sp>
+        <p:nvSpPr>
+          <p:cNvPr id="34" name="Text 32"/>
+          <p:cNvSpPr txBox="1"/>
+          <p:nvPr/>
+        </p:nvSpPr>
+        <p:spPr>
+          <a:xfrm>
+            <a:off x="6309360" y="5376672"/>
+            <a:ext cx="5330952" cy="219456"/>
+          </a:xfrm>
+          <a:prstGeom prst="rect">
+            <a:avLst/>
+          </a:prstGeom>
+          <a:noFill/>
+          <a:ln/>
+        </p:spPr>
+        <p:txBody>
+          <a:bodyPr wrap="square" lIns="0" tIns="0" rIns="0" bIns="0" rtlCol="0" anchor="ctr"/>
+          <a:lstStyle/>
+          <a:p>
+            <a:pPr indent="0" marL="0">
+              <a:buNone/>
+            </a:pPr>
+            <a:r>
+              <a:rPr lang="en-US" sz="1050" b="1" dirty="0">
+                <a:solidFill>
+                  <a:srgbClr val="16161A"/>
+                </a:solidFill>
+                <a:latin typeface="Calibri" pitchFamily="34" charset="0"/>
+                <a:ea typeface="Calibri" pitchFamily="34" charset="-122"/>
+                <a:cs typeface="Calibri" pitchFamily="34" charset="-120"/>
+              </a:rPr>
+              <a:t>Müdahale kutusunu küçük tutturun.</a:t>
+            </a:r>
+            <a:endParaRPr lang="en-US" sz="1050" dirty="0"/>
+          </a:p>
+        </p:txBody>
+      </p:sp>
+      <p:sp>
+        <p:nvSpPr>
+          <p:cNvPr id="35" name="Text 33"/>
+          <p:cNvSpPr txBox="1"/>
+          <p:nvPr/>
+        </p:nvSpPr>
+        <p:spPr>
+          <a:xfrm>
+            <a:off x="6309360" y="5596128"/>
+            <a:ext cx="5330952" cy="475488"/>
+          </a:xfrm>
+          <a:prstGeom prst="rect">
+            <a:avLst/>
+          </a:prstGeom>
+          <a:noFill/>
+          <a:ln/>
+        </p:spPr>
+        <p:txBody>
+          <a:bodyPr wrap="square" lIns="0" tIns="0" rIns="0" bIns="0" rtlCol="0" anchor="ctr"/>
+          <a:lstStyle/>
+          <a:p>
+            <a:pPr indent="0" marL="0">
+              <a:lnSpc>
+                <a:spcPts val="1250"/>
+              </a:lnSpc>
+              <a:buNone/>
+            </a:pPr>
+            <a:r>
+              <a:rPr lang="en-US" sz="1000" dirty="0">
+                <a:solidFill>
+                  <a:srgbClr val="7A7A82"/>
+                </a:solidFill>
+                <a:latin typeface="Calibri" pitchFamily="34" charset="0"/>
+                <a:ea typeface="Calibri" pitchFamily="34" charset="-122"/>
+                <a:cs typeface="Calibri" pitchFamily="34" charset="-120"/>
+              </a:rPr>
+              <a:t>Amaç tasarlamak değil, analizin bir karara bağlanabildiğini görmek. Tek cümle + kaba eskiz yeter.</a:t>
+            </a:r>
+            <a:endParaRPr lang="en-US" sz="1000" dirty="0"/>
+          </a:p>
+        </p:txBody>
+      </p:sp>
+      <p:sp>
+        <p:nvSpPr>
+          <p:cNvPr id="36" name="Text 34"/>
+          <p:cNvSpPr txBox="1"/>
+          <p:nvPr/>
+        </p:nvSpPr>
+        <p:spPr>
+          <a:xfrm>
+            <a:off x="548640" y="6272784"/>
+            <a:ext cx="11091672" cy="365760"/>
           </a:xfrm>
           <a:prstGeom prst="rect">
             <a:avLst/>
@@ -4163,219 +6312,15 @@
               <a:buNone/>
             </a:pPr>
             <a:r>
-              <a:rPr lang="en-US" sz="1200" dirty="0">
-                <a:solidFill>
-                  <a:srgbClr val="2B2B31"/>
+              <a:rPr lang="en-US" sz="1200" i="1" dirty="0">
+                <a:solidFill>
+                  <a:srgbClr val="8C3A2B"/>
                 </a:solidFill>
                 <a:latin typeface="Cambria" pitchFamily="34" charset="0"/>
                 <a:ea typeface="Cambria" pitchFamily="34" charset="-122"/>
                 <a:cs typeface="Cambria" pitchFamily="34" charset="-120"/>
               </a:rPr>
-              <a:t>Ürünler tek tek, aralarında 30–40 cm boşlukla duruyor. Her parçanın üstünde ayrı bir nokta ışık var. Raf sayısı az.</a:t>
-            </a:r>
-            <a:endParaRPr lang="en-US" sz="1200" dirty="0"/>
-          </a:p>
-        </p:txBody>
-      </p:sp>
-      <p:sp>
-        <p:nvSpPr>
-          <p:cNvPr id="31" name="Text 29"/>
-          <p:cNvSpPr txBox="1"/>
-          <p:nvPr/>
-        </p:nvSpPr>
-        <p:spPr>
-          <a:xfrm>
-            <a:off x="548640" y="5413248"/>
-            <a:ext cx="1600200" cy="274320"/>
-          </a:xfrm>
-          <a:prstGeom prst="rect">
-            <a:avLst/>
-          </a:prstGeom>
-          <a:noFill/>
-          <a:ln/>
-        </p:spPr>
-        <p:txBody>
-          <a:bodyPr wrap="square" lIns="0" tIns="0" rIns="0" bIns="0" rtlCol="0" anchor="ctr"/>
-          <a:lstStyle/>
-          <a:p>
-            <a:pPr indent="0" marL="0">
-              <a:buNone/>
-            </a:pPr>
-            <a:r>
-              <a:rPr lang="en-US" sz="850" b="1" spc="120" kern="0" dirty="0">
-                <a:solidFill>
-                  <a:srgbClr val="A6A6AC"/>
-                </a:solidFill>
-                <a:latin typeface="Calibri" pitchFamily="34" charset="0"/>
-                <a:ea typeface="Calibri" pitchFamily="34" charset="-122"/>
-                <a:cs typeface="Calibri" pitchFamily="34" charset="-120"/>
-              </a:rPr>
-              <a:t>ÇIKARDIĞIM</a:t>
-            </a:r>
-            <a:endParaRPr lang="en-US" sz="850" dirty="0"/>
-          </a:p>
-        </p:txBody>
-      </p:sp>
-      <p:sp>
-        <p:nvSpPr>
-          <p:cNvPr id="32" name="Text 30"/>
-          <p:cNvSpPr txBox="1"/>
-          <p:nvPr/>
-        </p:nvSpPr>
-        <p:spPr>
-          <a:xfrm>
-            <a:off x="2240280" y="5376672"/>
-            <a:ext cx="9400032" cy="457200"/>
-          </a:xfrm>
-          <a:prstGeom prst="rect">
-            <a:avLst/>
-          </a:prstGeom>
-          <a:noFill/>
-          <a:ln/>
-        </p:spPr>
-        <p:txBody>
-          <a:bodyPr wrap="square" lIns="0" tIns="0" rIns="0" bIns="0" rtlCol="0" anchor="ctr"/>
-          <a:lstStyle/>
-          <a:p>
-            <a:pPr indent="0" marL="0">
-              <a:lnSpc>
-                <a:spcPts val="1600"/>
-              </a:lnSpc>
-              <a:buNone/>
-            </a:pPr>
-            <a:r>
-              <a:rPr lang="en-US" sz="1200" dirty="0">
-                <a:solidFill>
-                  <a:srgbClr val="2B2B31"/>
-                </a:solidFill>
-                <a:latin typeface="Cambria" pitchFamily="34" charset="0"/>
-                <a:ea typeface="Cambria" pitchFamily="34" charset="-122"/>
-                <a:cs typeface="Cambria" pitchFamily="34" charset="-120"/>
-              </a:rPr>
-              <a:t>Ürünler birbirinin aynısı değil; her biri tekil. Marka “el yapımı” iddiasında ve bunu yoğunluk düşürerek kanıtlıyor.</a:t>
-            </a:r>
-            <a:endParaRPr lang="en-US" sz="1200" dirty="0"/>
-          </a:p>
-        </p:txBody>
-      </p:sp>
-      <p:sp>
-        <p:nvSpPr>
-          <p:cNvPr id="33" name="Text 31"/>
-          <p:cNvSpPr txBox="1"/>
-          <p:nvPr/>
-        </p:nvSpPr>
-        <p:spPr>
-          <a:xfrm>
-            <a:off x="548640" y="5870448"/>
-            <a:ext cx="1600200" cy="274320"/>
-          </a:xfrm>
-          <a:prstGeom prst="rect">
-            <a:avLst/>
-          </a:prstGeom>
-          <a:noFill/>
-          <a:ln/>
-        </p:spPr>
-        <p:txBody>
-          <a:bodyPr wrap="square" lIns="0" tIns="0" rIns="0" bIns="0" rtlCol="0" anchor="ctr"/>
-          <a:lstStyle/>
-          <a:p>
-            <a:pPr indent="0" marL="0">
-              <a:buNone/>
-            </a:pPr>
-            <a:r>
-              <a:rPr lang="en-US" sz="850" b="1" spc="120" kern="0" dirty="0">
-                <a:solidFill>
-                  <a:srgbClr val="A6A6AC"/>
-                </a:solidFill>
-                <a:latin typeface="Calibri" pitchFamily="34" charset="0"/>
-                <a:ea typeface="Calibri" pitchFamily="34" charset="-122"/>
-                <a:cs typeface="Calibri" pitchFamily="34" charset="-120"/>
-              </a:rPr>
-              <a:t>ANAHTAR KELİME</a:t>
-            </a:r>
-            <a:endParaRPr lang="en-US" sz="850" dirty="0"/>
-          </a:p>
-        </p:txBody>
-      </p:sp>
-      <p:sp>
-        <p:nvSpPr>
-          <p:cNvPr id="34" name="Text 32"/>
-          <p:cNvSpPr txBox="1"/>
-          <p:nvPr/>
-        </p:nvSpPr>
-        <p:spPr>
-          <a:xfrm>
-            <a:off x="2240280" y="5833872"/>
-            <a:ext cx="9400032" cy="457200"/>
-          </a:xfrm>
-          <a:prstGeom prst="rect">
-            <a:avLst/>
-          </a:prstGeom>
-          <a:noFill/>
-          <a:ln/>
-        </p:spPr>
-        <p:txBody>
-          <a:bodyPr wrap="square" lIns="0" tIns="0" rIns="0" bIns="0" rtlCol="0" anchor="ctr"/>
-          <a:lstStyle/>
-          <a:p>
-            <a:pPr indent="0" marL="0">
-              <a:lnSpc>
-                <a:spcPts val="1600"/>
-              </a:lnSpc>
-              <a:buNone/>
-            </a:pPr>
-            <a:r>
-              <a:rPr lang="en-US" sz="1200" dirty="0">
-                <a:solidFill>
-                  <a:srgbClr val="2B2B31"/>
-                </a:solidFill>
-                <a:latin typeface="Cambria" pitchFamily="34" charset="0"/>
-                <a:ea typeface="Cambria" pitchFamily="34" charset="-122"/>
-                <a:cs typeface="Cambria" pitchFamily="34" charset="-120"/>
-              </a:rPr>
-              <a:t>TEKİLLİK  —  kanıt: ürünler arası boşluk ve parça başına ayrı aydınlatma.</a:t>
-            </a:r>
-            <a:endParaRPr lang="en-US" sz="1200" dirty="0"/>
-          </a:p>
-        </p:txBody>
-      </p:sp>
-      <p:sp>
-        <p:nvSpPr>
-          <p:cNvPr id="35" name="Text 33"/>
-          <p:cNvSpPr txBox="1"/>
-          <p:nvPr/>
-        </p:nvSpPr>
-        <p:spPr>
-          <a:xfrm>
-            <a:off x="548640" y="6382512"/>
-            <a:ext cx="11091672" cy="365760"/>
-          </a:xfrm>
-          <a:prstGeom prst="rect">
-            <a:avLst/>
-          </a:prstGeom>
-          <a:noFill/>
-          <a:ln/>
-        </p:spPr>
-        <p:txBody>
-          <a:bodyPr wrap="square" lIns="0" tIns="0" rIns="0" bIns="0" rtlCol="0" anchor="ctr"/>
-          <a:lstStyle/>
-          <a:p>
-            <a:pPr indent="0" marL="0">
-              <a:lnSpc>
-                <a:spcPts val="1600"/>
-              </a:lnSpc>
-              <a:buNone/>
-            </a:pPr>
-            <a:r>
-              <a:rPr lang="en-US" sz="1200" i="1" dirty="0">
-                <a:solidFill>
-                  <a:srgbClr val="8C3A2B"/>
-                </a:solidFill>
-                <a:latin typeface="Cambria" pitchFamily="34" charset="0"/>
-                <a:ea typeface="Cambria" pitchFamily="34" charset="-122"/>
-                <a:cs typeface="Cambria" pitchFamily="34" charset="-120"/>
-              </a:rPr>
-              <a:t>En sık görülen hata: kanıtsız çıkarım. “Lüks bir marka” yazıp geçmek. Her çıkarımın yanında görseldeki dayanağını isteyin — bu alışkanlık dönem boyunca işinize yarayacak.</a:t>
+              <a:t>En sık görülen hata kanıtsız çıkarımdır: “lüks bir marka” yazıp geçmek. Her çıkarımın yanında görseldeki dayanağını isteyin.</a:t>
             </a:r>
             <a:endParaRPr lang="en-US" sz="1200" dirty="0"/>
           </a:p>
